--- a/ppt/Pooja_X25120921_smart-parking-management.pptx
+++ b/ppt/Pooja_X25120921_smart-parking-management.pptx
@@ -1150,20 +1150,59 @@
         </p:nvSpPr>
         <p:spPr>
           <a:xfrm>
-            <a:off x="640080" y="914400"/>
-            <a:ext cx="10972800" cy="1280160"/>
-          </a:xfrm>
-          <a:prstGeom prst="rect">
-            <a:avLst/>
-          </a:prstGeom>
-          <a:noFill/>
-          <a:ln/>
-        </p:spPr>
-        <p:txBody>
-          <a:bodyPr wrap="square" rtlCol="0" anchor="t"/>
-          <a:lstStyle/>
-          <a:p>
-            <a:pPr algn="l" indent="0" marL="0">
+            <a:off x="658368" y="640080"/>
+            <a:ext cx="10972800" cy="365760"/>
+          </a:xfrm>
+          <a:prstGeom prst="rect">
+            <a:avLst/>
+          </a:prstGeom>
+          <a:noFill/>
+          <a:ln/>
+        </p:spPr>
+        <p:txBody>
+          <a:bodyPr wrap="square" rtlCol="0" anchor="ctr"/>
+          <a:lstStyle/>
+          <a:p>
+            <a:pPr indent="0" marL="0">
+              <a:buNone/>
+            </a:pPr>
+            <a:r>
+              <a:rPr lang="en-US" sz="1400" b="1" spc="300" kern="0" dirty="0">
+                <a:solidFill>
+                  <a:srgbClr val="E3A93C"/>
+                </a:solidFill>
+                <a:latin typeface="Calibri" pitchFamily="34" charset="0"/>
+                <a:ea typeface="Calibri" pitchFamily="34" charset="-122"/>
+                <a:cs typeface="Calibri" pitchFamily="34" charset="-120"/>
+              </a:rPr>
+              <a:t>SMART PARKING MANAGEMENT</a:t>
+            </a:r>
+            <a:endParaRPr lang="en-US" sz="1400" dirty="0"/>
+          </a:p>
+        </p:txBody>
+      </p:sp>
+      <p:sp>
+        <p:nvSpPr>
+          <p:cNvPr id="3" name="Text 1"/>
+          <p:cNvSpPr/>
+          <p:nvPr/>
+        </p:nvSpPr>
+        <p:spPr>
+          <a:xfrm>
+            <a:off x="640080" y="2514600"/>
+            <a:ext cx="10972800" cy="1188720"/>
+          </a:xfrm>
+          <a:prstGeom prst="rect">
+            <a:avLst/>
+          </a:prstGeom>
+          <a:noFill/>
+          <a:ln/>
+        </p:spPr>
+        <p:txBody>
+          <a:bodyPr wrap="square" rtlCol="0" anchor="ctr"/>
+          <a:lstStyle/>
+          <a:p>
+            <a:pPr indent="0" marL="0">
               <a:buNone/>
             </a:pPr>
             <a:r>
@@ -1183,13 +1222,13 @@
       </p:sp>
       <p:sp>
         <p:nvSpPr>
-          <p:cNvPr id="3" name="Text 1"/>
-          <p:cNvSpPr/>
-          <p:nvPr/>
-        </p:nvSpPr>
-        <p:spPr>
-          <a:xfrm>
-            <a:off x="658368" y="2148840"/>
+          <p:cNvPr id="4" name="Text 2"/>
+          <p:cNvSpPr/>
+          <p:nvPr/>
+        </p:nvSpPr>
+        <p:spPr>
+          <a:xfrm>
+            <a:off x="658368" y="3703320"/>
             <a:ext cx="10972800" cy="365760"/>
           </a:xfrm>
           <a:prstGeom prst="rect">
@@ -1222,14 +1261,14 @@
       </p:sp>
       <p:sp>
         <p:nvSpPr>
-          <p:cNvPr id="4" name="Text 2"/>
-          <p:cNvSpPr/>
-          <p:nvPr/>
-        </p:nvSpPr>
-        <p:spPr>
-          <a:xfrm>
-            <a:off x="658368" y="2697480"/>
-            <a:ext cx="10424160" cy="1371600"/>
+          <p:cNvPr id="5" name="Text 3"/>
+          <p:cNvSpPr/>
+          <p:nvPr/>
+        </p:nvSpPr>
+        <p:spPr>
+          <a:xfrm>
+            <a:off x="658368" y="4251960"/>
+            <a:ext cx="10424160" cy="1188720"/>
           </a:xfrm>
           <a:prstGeom prst="rect">
             <a:avLst/>
@@ -1243,12 +1282,12 @@
           <a:p>
             <a:pPr indent="0" marL="0">
               <a:lnSpc>
-                <a:spcPct val="110000"/>
+                <a:spcPct val="108000"/>
               </a:lnSpc>
               <a:buNone/>
             </a:pPr>
             <a:r>
-              <a:rPr lang="en-US" sz="2000" dirty="0">
+              <a:rPr lang="en-US" sz="1800" dirty="0">
                 <a:solidFill>
                   <a:srgbClr val="DBD0EC"/>
                 </a:solidFill>
@@ -1258,19 +1297,19 @@
               </a:rPr>
               <a:t>An operator asks two things at once — how full is each lot, and is anything wrong — and they are not the same question: a lot can be busy but healthy, or nearly empty yet faulted.</a:t>
             </a:r>
-            <a:endParaRPr lang="en-US" sz="2000" dirty="0"/>
-          </a:p>
-        </p:txBody>
-      </p:sp>
-      <p:sp>
-        <p:nvSpPr>
-          <p:cNvPr id="5" name="Shape 3"/>
-          <p:cNvSpPr/>
-          <p:nvPr/>
-        </p:nvSpPr>
-        <p:spPr>
-          <a:xfrm>
-            <a:off x="658368" y="4206240"/>
+            <a:endParaRPr lang="en-US" sz="1800" dirty="0"/>
+          </a:p>
+        </p:txBody>
+      </p:sp>
+      <p:sp>
+        <p:nvSpPr>
+          <p:cNvPr id="6" name="Shape 4"/>
+          <p:cNvSpPr/>
+          <p:nvPr/>
+        </p:nvSpPr>
+        <p:spPr>
+          <a:xfrm>
+            <a:off x="658368" y="5623560"/>
             <a:ext cx="2651760" cy="566928"/>
           </a:xfrm>
           <a:prstGeom prst="roundRect">
@@ -1291,13 +1330,13 @@
       </p:sp>
       <p:sp>
         <p:nvSpPr>
-          <p:cNvPr id="6" name="Text 4"/>
-          <p:cNvSpPr/>
-          <p:nvPr/>
-        </p:nvSpPr>
-        <p:spPr>
-          <a:xfrm>
-            <a:off x="658368" y="4206240"/>
+          <p:cNvPr id="7" name="Text 5"/>
+          <p:cNvSpPr/>
+          <p:nvPr/>
+        </p:nvSpPr>
+        <p:spPr>
+          <a:xfrm>
+            <a:off x="658368" y="5623560"/>
             <a:ext cx="2651760" cy="566928"/>
           </a:xfrm>
           <a:prstGeom prst="rect">
@@ -1314,7 +1353,7 @@
               <a:buNone/>
             </a:pPr>
             <a:r>
-              <a:rPr lang="en-US" sz="1400" b="1" dirty="0">
+              <a:rPr lang="en-US" sz="1350" b="1" dirty="0">
                 <a:solidFill>
                   <a:srgbClr val="E3A93C"/>
                 </a:solidFill>
@@ -1324,19 +1363,19 @@
               </a:rPr>
               <a:t>Near full &gt; 270/300</a:t>
             </a:r>
-            <a:endParaRPr lang="en-US" sz="1400" dirty="0"/>
-          </a:p>
-        </p:txBody>
-      </p:sp>
-      <p:sp>
-        <p:nvSpPr>
-          <p:cNvPr id="7" name="Shape 5"/>
-          <p:cNvSpPr/>
-          <p:nvPr/>
-        </p:nvSpPr>
-        <p:spPr>
-          <a:xfrm>
-            <a:off x="3538728" y="4206240"/>
+            <a:endParaRPr lang="en-US" sz="1350" dirty="0"/>
+          </a:p>
+        </p:txBody>
+      </p:sp>
+      <p:sp>
+        <p:nvSpPr>
+          <p:cNvPr id="8" name="Shape 6"/>
+          <p:cNvSpPr/>
+          <p:nvPr/>
+        </p:nvSpPr>
+        <p:spPr>
+          <a:xfrm>
+            <a:off x="3538728" y="5623560"/>
             <a:ext cx="2651760" cy="566928"/>
           </a:xfrm>
           <a:prstGeom prst="roundRect">
@@ -1357,13 +1396,13 @@
       </p:sp>
       <p:sp>
         <p:nvSpPr>
-          <p:cNvPr id="8" name="Text 6"/>
-          <p:cNvSpPr/>
-          <p:nvPr/>
-        </p:nvSpPr>
-        <p:spPr>
-          <a:xfrm>
-            <a:off x="3538728" y="4206240"/>
+          <p:cNvPr id="9" name="Text 7"/>
+          <p:cNvSpPr/>
+          <p:nvPr/>
+        </p:nvSpPr>
+        <p:spPr>
+          <a:xfrm>
+            <a:off x="3538728" y="5623560"/>
             <a:ext cx="2651760" cy="566928"/>
           </a:xfrm>
           <a:prstGeom prst="rect">
@@ -1380,7 +1419,7 @@
               <a:buNone/>
             </a:pPr>
             <a:r>
-              <a:rPr lang="en-US" sz="1400" b="1" dirty="0">
+              <a:rPr lang="en-US" sz="1350" b="1" dirty="0">
                 <a:solidFill>
                   <a:srgbClr val="E3A93C"/>
                 </a:solidFill>
@@ -1390,19 +1429,19 @@
               </a:rPr>
               <a:t>Inflow &gt; 20 veh/min</a:t>
             </a:r>
-            <a:endParaRPr lang="en-US" sz="1400" dirty="0"/>
-          </a:p>
-        </p:txBody>
-      </p:sp>
-      <p:sp>
-        <p:nvSpPr>
-          <p:cNvPr id="9" name="Shape 7"/>
-          <p:cNvSpPr/>
-          <p:nvPr/>
-        </p:nvSpPr>
-        <p:spPr>
-          <a:xfrm>
-            <a:off x="6419088" y="4206240"/>
+            <a:endParaRPr lang="en-US" sz="1350" dirty="0"/>
+          </a:p>
+        </p:txBody>
+      </p:sp>
+      <p:sp>
+        <p:nvSpPr>
+          <p:cNvPr id="10" name="Shape 8"/>
+          <p:cNvSpPr/>
+          <p:nvPr/>
+        </p:nvSpPr>
+        <p:spPr>
+          <a:xfrm>
+            <a:off x="6419088" y="5623560"/>
             <a:ext cx="2651760" cy="566928"/>
           </a:xfrm>
           <a:prstGeom prst="roundRect">
@@ -1423,13 +1462,13 @@
       </p:sp>
       <p:sp>
         <p:nvSpPr>
-          <p:cNvPr id="10" name="Text 8"/>
-          <p:cNvSpPr/>
-          <p:nvPr/>
-        </p:nvSpPr>
-        <p:spPr>
-          <a:xfrm>
-            <a:off x="6419088" y="4206240"/>
+          <p:cNvPr id="11" name="Text 9"/>
+          <p:cNvSpPr/>
+          <p:nvPr/>
+        </p:nvSpPr>
+        <p:spPr>
+          <a:xfrm>
+            <a:off x="6419088" y="5623560"/>
             <a:ext cx="2651760" cy="566928"/>
           </a:xfrm>
           <a:prstGeom prst="rect">
@@ -1446,7 +1485,7 @@
               <a:buNone/>
             </a:pPr>
             <a:r>
-              <a:rPr lang="en-US" sz="1400" b="1" dirty="0">
+              <a:rPr lang="en-US" sz="1350" b="1" dirty="0">
                 <a:solidFill>
                   <a:srgbClr val="E3A93C"/>
                 </a:solidFill>
@@ -1456,20 +1495,20 @@
               </a:rPr>
               <a:t>Gate fault &gt; 3</a:t>
             </a:r>
-            <a:endParaRPr lang="en-US" sz="1400" dirty="0"/>
-          </a:p>
-        </p:txBody>
-      </p:sp>
-      <p:sp>
-        <p:nvSpPr>
-          <p:cNvPr id="11" name="Text 9"/>
-          <p:cNvSpPr/>
-          <p:nvPr/>
-        </p:nvSpPr>
-        <p:spPr>
-          <a:xfrm>
-            <a:off x="658368" y="6126480"/>
-            <a:ext cx="10972800" cy="365760"/>
+            <a:endParaRPr lang="en-US" sz="1350" dirty="0"/>
+          </a:p>
+        </p:txBody>
+      </p:sp>
+      <p:sp>
+        <p:nvSpPr>
+          <p:cNvPr id="12" name="Text 10"/>
+          <p:cNvSpPr/>
+          <p:nvPr/>
+        </p:nvSpPr>
+        <p:spPr>
+          <a:xfrm>
+            <a:off x="658368" y="6400800"/>
+            <a:ext cx="10972800" cy="320040"/>
           </a:xfrm>
           <a:prstGeom prst="rect">
             <a:avLst/>
@@ -1485,7 +1524,7 @@
               <a:buNone/>
             </a:pPr>
             <a:r>
-              <a:rPr lang="en-US" sz="1300" dirty="0">
+              <a:rPr lang="en-US" sz="1250" dirty="0">
                 <a:solidFill>
                   <a:srgbClr val="665F78"/>
                 </a:solidFill>
@@ -1495,7 +1534,7 @@
               </a:rPr>
               <a:t>Fog &amp; Edge Computing (H9FECC)   ·   deployed live on AWS</a:t>
             </a:r>
-            <a:endParaRPr lang="en-US" sz="1300" dirty="0"/>
+            <a:endParaRPr lang="en-US" sz="1250" dirty="0"/>
           </a:p>
         </p:txBody>
       </p:sp>
@@ -1605,8 +1644,8 @@
         </p:nvSpPr>
         <p:spPr>
           <a:xfrm>
-            <a:off x="1325880" y="2670048"/>
-            <a:ext cx="201168" cy="201168"/>
+            <a:off x="1335024" y="2633472"/>
+            <a:ext cx="182880" cy="182880"/>
           </a:xfrm>
           <a:prstGeom prst="ellipse">
             <a:avLst/>
@@ -1625,8 +1664,8 @@
         </p:nvSpPr>
         <p:spPr>
           <a:xfrm>
-            <a:off x="594360" y="2926080"/>
-            <a:ext cx="1664208" cy="411480"/>
+            <a:off x="612648" y="2852928"/>
+            <a:ext cx="1627632" cy="365760"/>
           </a:xfrm>
           <a:prstGeom prst="rect">
             <a:avLst/>
@@ -1664,8 +1703,8 @@
         </p:nvSpPr>
         <p:spPr>
           <a:xfrm>
-            <a:off x="621792" y="3310128"/>
-            <a:ext cx="1609344" cy="457200"/>
+            <a:off x="640080" y="3200400"/>
+            <a:ext cx="1572768" cy="411480"/>
           </a:xfrm>
           <a:prstGeom prst="rect">
             <a:avLst/>
@@ -1754,8 +1793,8 @@
         </p:nvSpPr>
         <p:spPr>
           <a:xfrm>
-            <a:off x="3193633" y="2670048"/>
-            <a:ext cx="201168" cy="201168"/>
+            <a:off x="3202777" y="2633472"/>
+            <a:ext cx="182880" cy="182880"/>
           </a:xfrm>
           <a:prstGeom prst="ellipse">
             <a:avLst/>
@@ -1774,8 +1813,8 @@
         </p:nvSpPr>
         <p:spPr>
           <a:xfrm>
-            <a:off x="2462113" y="2926080"/>
-            <a:ext cx="1664208" cy="411480"/>
+            <a:off x="2480401" y="2852928"/>
+            <a:ext cx="1627632" cy="365760"/>
           </a:xfrm>
           <a:prstGeom prst="rect">
             <a:avLst/>
@@ -1813,8 +1852,8 @@
         </p:nvSpPr>
         <p:spPr>
           <a:xfrm>
-            <a:off x="2489545" y="3310128"/>
-            <a:ext cx="1609344" cy="457200"/>
+            <a:off x="2507833" y="3200400"/>
+            <a:ext cx="1572768" cy="411480"/>
           </a:xfrm>
           <a:prstGeom prst="rect">
             <a:avLst/>
@@ -1903,8 +1942,8 @@
         </p:nvSpPr>
         <p:spPr>
           <a:xfrm>
-            <a:off x="5061387" y="2670048"/>
-            <a:ext cx="201168" cy="201168"/>
+            <a:off x="5070531" y="2633472"/>
+            <a:ext cx="182880" cy="182880"/>
           </a:xfrm>
           <a:prstGeom prst="ellipse">
             <a:avLst/>
@@ -1923,8 +1962,8 @@
         </p:nvSpPr>
         <p:spPr>
           <a:xfrm>
-            <a:off x="4329867" y="2926080"/>
-            <a:ext cx="1664208" cy="411480"/>
+            <a:off x="4348155" y="2852928"/>
+            <a:ext cx="1627632" cy="365760"/>
           </a:xfrm>
           <a:prstGeom prst="rect">
             <a:avLst/>
@@ -1962,8 +2001,8 @@
         </p:nvSpPr>
         <p:spPr>
           <a:xfrm>
-            <a:off x="4357299" y="3310128"/>
-            <a:ext cx="1609344" cy="457200"/>
+            <a:off x="4375587" y="3200400"/>
+            <a:ext cx="1572768" cy="411480"/>
           </a:xfrm>
           <a:prstGeom prst="rect">
             <a:avLst/>
@@ -2052,8 +2091,8 @@
         </p:nvSpPr>
         <p:spPr>
           <a:xfrm>
-            <a:off x="6929140" y="2670048"/>
-            <a:ext cx="201168" cy="201168"/>
+            <a:off x="6938284" y="2633472"/>
+            <a:ext cx="182880" cy="182880"/>
           </a:xfrm>
           <a:prstGeom prst="ellipse">
             <a:avLst/>
@@ -2072,8 +2111,8 @@
         </p:nvSpPr>
         <p:spPr>
           <a:xfrm>
-            <a:off x="6197620" y="2926080"/>
-            <a:ext cx="1664208" cy="411480"/>
+            <a:off x="6215908" y="2852928"/>
+            <a:ext cx="1627632" cy="365760"/>
           </a:xfrm>
           <a:prstGeom prst="rect">
             <a:avLst/>
@@ -2111,8 +2150,8 @@
         </p:nvSpPr>
         <p:spPr>
           <a:xfrm>
-            <a:off x="6225052" y="3310128"/>
-            <a:ext cx="1609344" cy="457200"/>
+            <a:off x="6243340" y="3200400"/>
+            <a:ext cx="1572768" cy="411480"/>
           </a:xfrm>
           <a:prstGeom prst="rect">
             <a:avLst/>
@@ -2201,8 +2240,8 @@
         </p:nvSpPr>
         <p:spPr>
           <a:xfrm>
-            <a:off x="8796894" y="2670048"/>
-            <a:ext cx="201168" cy="201168"/>
+            <a:off x="8806038" y="2633472"/>
+            <a:ext cx="182880" cy="182880"/>
           </a:xfrm>
           <a:prstGeom prst="ellipse">
             <a:avLst/>
@@ -2221,8 +2260,8 @@
         </p:nvSpPr>
         <p:spPr>
           <a:xfrm>
-            <a:off x="8065374" y="2926080"/>
-            <a:ext cx="1664208" cy="411480"/>
+            <a:off x="8083662" y="2852928"/>
+            <a:ext cx="1627632" cy="365760"/>
           </a:xfrm>
           <a:prstGeom prst="rect">
             <a:avLst/>
@@ -2260,8 +2299,8 @@
         </p:nvSpPr>
         <p:spPr>
           <a:xfrm>
-            <a:off x="8092806" y="3310128"/>
-            <a:ext cx="1609344" cy="457200"/>
+            <a:off x="8111094" y="3200400"/>
+            <a:ext cx="1572768" cy="411480"/>
           </a:xfrm>
           <a:prstGeom prst="rect">
             <a:avLst/>
@@ -2350,8 +2389,8 @@
         </p:nvSpPr>
         <p:spPr>
           <a:xfrm>
-            <a:off x="10664647" y="2670048"/>
-            <a:ext cx="201168" cy="201168"/>
+            <a:off x="10673791" y="2633472"/>
+            <a:ext cx="182880" cy="182880"/>
           </a:xfrm>
           <a:prstGeom prst="ellipse">
             <a:avLst/>
@@ -2370,8 +2409,8 @@
         </p:nvSpPr>
         <p:spPr>
           <a:xfrm>
-            <a:off x="9933127" y="2926080"/>
-            <a:ext cx="1664208" cy="411480"/>
+            <a:off x="9951415" y="2852928"/>
+            <a:ext cx="1627632" cy="365760"/>
           </a:xfrm>
           <a:prstGeom prst="rect">
             <a:avLst/>
@@ -2409,8 +2448,8 @@
         </p:nvSpPr>
         <p:spPr>
           <a:xfrm>
-            <a:off x="9960559" y="3310128"/>
-            <a:ext cx="1609344" cy="457200"/>
+            <a:off x="9978847" y="3200400"/>
+            <a:ext cx="1572768" cy="411480"/>
           </a:xfrm>
           <a:prstGeom prst="rect">
             <a:avLst/>
@@ -2526,8 +2565,8 @@
         </p:nvSpPr>
         <p:spPr>
           <a:xfrm>
-            <a:off x="640080" y="5212080"/>
-            <a:ext cx="10972800" cy="640080"/>
+            <a:off x="640080" y="5257800"/>
+            <a:ext cx="10972800" cy="731520"/>
           </a:xfrm>
           <a:prstGeom prst="rect">
             <a:avLst/>
@@ -2759,7 +2798,7 @@
                 <a:ea typeface="Calibri" pitchFamily="34" charset="-122"/>
                 <a:cs typeface="Calibri" pitchFamily="34" charset="-120"/>
               </a:rPr>
-              <a:t>Pipeline health, all green</a:t>
+              <a:t>A capacity gauge and tier per lot</a:t>
             </a:r>
             <a:endParaRPr lang="en-US" sz="1800" dirty="0"/>
           </a:p>
@@ -2798,7 +2837,7 @@
                 <a:ea typeface="Calibri" pitchFamily="34" charset="-122"/>
                 <a:cs typeface="Calibri" pitchFamily="34" charset="-120"/>
               </a:rPr>
-              <a:t>Gateway, queue, processor and pipeline all green on the live console.</a:t>
+              <a:t>Each lot shows a live occupancy gauge and a four-tier badge — Quiet, Busy or Near-full — derived on read from its capacity percentage.</a:t>
             </a:r>
             <a:endParaRPr lang="en-US" sz="1350" dirty="0"/>
           </a:p>
@@ -2896,7 +2935,7 @@
                 <a:ea typeface="Calibri" pitchFamily="34" charset="-122"/>
                 <a:cs typeface="Calibri" pitchFamily="34" charset="-120"/>
               </a:rPr>
-              <a:t>The fusion, live</a:t>
+              <a:t>A fault outranks fullness</a:t>
             </a:r>
             <a:endParaRPr lang="en-US" sz="1800" dirty="0"/>
           </a:p>
@@ -2935,7 +2974,7 @@
                 <a:ea typeface="Calibri" pitchFamily="34" charset="-122"/>
                 <a:cs typeface="Calibri" pitchFamily="34" charset="-120"/>
               </a:rPr>
-              <a:t>Both lots stream five signals; one reads Normal while the other reads Alert on a gate-fault alarm despite low occupancy.</a:t>
+              <a:t>LOT-B reads Alert on a gate-fault alarm despite low occupancy, while LOT-A reads Normal — the fusion always shows the more urgent of the two.</a:t>
             </a:r>
             <a:endParaRPr lang="en-US" sz="1350" dirty="0"/>
           </a:p>
@@ -3033,7 +3072,7 @@
                 <a:ea typeface="Calibri" pitchFamily="34" charset="-122"/>
                 <a:cs typeface="Calibri" pitchFamily="34" charset="-120"/>
               </a:rPr>
-              <a:t>Tested and scales</a:t>
+              <a:t>An occupied-spaces trend per lot</a:t>
             </a:r>
             <a:endParaRPr lang="en-US" sz="1800" dirty="0"/>
           </a:p>
@@ -3072,7 +3111,7 @@
                 <a:ea typeface="Calibri" pitchFamily="34" charset="-122"/>
                 <a:cs typeface="Calibri" pitchFamily="34" charset="-120"/>
               </a:rPr>
-              <a:t>127 automated tests pass across sensor, fog, processor and dashboard; a 2,000-message burst from 32 senders drained.</a:t>
+              <a:t>The chart tracks both lots live, so a filling lot is visible before it reaches the near-full tier.</a:t>
             </a:r>
             <a:endParaRPr lang="en-US" sz="1350" dirty="0"/>
           </a:p>
@@ -3157,24 +3196,24 @@
         </p:nvSpPr>
         <p:spPr>
           <a:xfrm>
-            <a:off x="640080" y="640080"/>
-            <a:ext cx="10972800" cy="640080"/>
-          </a:xfrm>
-          <a:prstGeom prst="rect">
-            <a:avLst/>
-          </a:prstGeom>
-          <a:noFill/>
-          <a:ln/>
-        </p:spPr>
-        <p:txBody>
-          <a:bodyPr wrap="square" rtlCol="0" anchor="ctr"/>
+            <a:off x="640080" y="594360"/>
+            <a:ext cx="10972800" cy="822960"/>
+          </a:xfrm>
+          <a:prstGeom prst="rect">
+            <a:avLst/>
+          </a:prstGeom>
+          <a:noFill/>
+          <a:ln/>
+        </p:spPr>
+        <p:txBody>
+          <a:bodyPr wrap="square" rtlCol="0" anchor="t"/>
           <a:lstStyle/>
           <a:p>
             <a:pPr indent="0" marL="0">
               <a:buNone/>
             </a:pPr>
             <a:r>
-              <a:rPr lang="en-US" sz="3000" b="1" dirty="0">
+              <a:rPr lang="en-US" sz="2800" b="1" dirty="0">
                 <a:solidFill>
                   <a:srgbClr val="FFFFFF"/>
                 </a:solidFill>
@@ -3184,30 +3223,65 @@
               </a:rPr>
               <a:t>Hardest Part — how full, and what is wrong</a:t>
             </a:r>
-            <a:endParaRPr lang="en-US" sz="3000" dirty="0"/>
-          </a:p>
-        </p:txBody>
-      </p:sp>
-      <p:sp>
-        <p:nvSpPr>
-          <p:cNvPr id="3" name="Shape 1"/>
-          <p:cNvSpPr/>
-          <p:nvPr/>
-        </p:nvSpPr>
-        <p:spPr>
-          <a:xfrm>
-            <a:off x="731520" y="1920240"/>
-            <a:ext cx="10698480" cy="1965960"/>
-          </a:xfrm>
-          <a:prstGeom prst="roundRect">
-            <a:avLst>
-              <a:gd name="adj" fmla="val 4651"/>
-            </a:avLst>
-          </a:prstGeom>
-          <a:solidFill>
-            <a:srgbClr val="29223F"/>
-          </a:solidFill>
-          <a:ln w="15875">
+            <a:endParaRPr lang="en-US" sz="2800" dirty="0"/>
+          </a:p>
+        </p:txBody>
+      </p:sp>
+      <p:sp>
+        <p:nvSpPr>
+          <p:cNvPr id="3" name="Text 1"/>
+          <p:cNvSpPr/>
+          <p:nvPr/>
+        </p:nvSpPr>
+        <p:spPr>
+          <a:xfrm>
+            <a:off x="731520" y="1965960"/>
+            <a:ext cx="2377440" cy="548640"/>
+          </a:xfrm>
+          <a:prstGeom prst="rect">
+            <a:avLst/>
+          </a:prstGeom>
+          <a:noFill/>
+          <a:ln/>
+        </p:spPr>
+        <p:txBody>
+          <a:bodyPr wrap="square" lIns="0" tIns="0" rIns="0" bIns="0" rtlCol="0" anchor="ctr"/>
+          <a:lstStyle/>
+          <a:p>
+            <a:pPr indent="0" marL="0">
+              <a:buNone/>
+            </a:pPr>
+            <a:r>
+              <a:rPr lang="en-US" sz="2200" b="1" dirty="0">
+                <a:solidFill>
+                  <a:srgbClr val="E3A93C"/>
+                </a:solidFill>
+                <a:latin typeface="Century Schoolbook" pitchFamily="34" charset="0"/>
+                <a:ea typeface="Century Schoolbook" pitchFamily="34" charset="-122"/>
+                <a:cs typeface="Century Schoolbook" pitchFamily="34" charset="-120"/>
+              </a:rPr>
+              <a:t>Problem</a:t>
+            </a:r>
+            <a:endParaRPr lang="en-US" sz="2200" dirty="0"/>
+          </a:p>
+        </p:txBody>
+      </p:sp>
+      <p:sp>
+        <p:nvSpPr>
+          <p:cNvPr id="4" name="Shape 2"/>
+          <p:cNvSpPr/>
+          <p:nvPr/>
+        </p:nvSpPr>
+        <p:spPr>
+          <a:xfrm>
+            <a:off x="3200400" y="1920240"/>
+            <a:ext cx="0" cy="1737360"/>
+          </a:xfrm>
+          <a:prstGeom prst="line">
+            <a:avLst/>
+          </a:prstGeom>
+          <a:noFill/>
+          <a:ln w="25400">
             <a:solidFill>
               <a:srgbClr val="E3A93C"/>
             </a:solidFill>
@@ -3217,14 +3291,14 @@
       </p:sp>
       <p:sp>
         <p:nvSpPr>
-          <p:cNvPr id="4" name="Text 2"/>
-          <p:cNvSpPr/>
-          <p:nvPr/>
-        </p:nvSpPr>
-        <p:spPr>
-          <a:xfrm>
-            <a:off x="1005840" y="2103120"/>
-            <a:ext cx="3657600" cy="457200"/>
+          <p:cNvPr id="5" name="Text 3"/>
+          <p:cNvSpPr/>
+          <p:nvPr/>
+        </p:nvSpPr>
+        <p:spPr>
+          <a:xfrm>
+            <a:off x="3474720" y="1920240"/>
+            <a:ext cx="7955280" cy="1874520"/>
           </a:xfrm>
           <a:prstGeom prst="rect">
             <a:avLst/>
@@ -3237,85 +3311,81 @@
           <a:lstStyle/>
           <a:p>
             <a:pPr indent="0" marL="0">
-              <a:buNone/>
-            </a:pPr>
-            <a:r>
-              <a:rPr lang="en-US" sz="1900" b="1" dirty="0">
-                <a:solidFill>
-                  <a:srgbClr val="E3A93C"/>
+              <a:lnSpc>
+                <a:spcPct val="110000"/>
+              </a:lnSpc>
+              <a:buNone/>
+            </a:pPr>
+            <a:r>
+              <a:rPr lang="en-US" sz="1450" dirty="0">
+                <a:solidFill>
+                  <a:srgbClr val="DBD0EC"/>
+                </a:solidFill>
+                <a:latin typeface="Calibri" pitchFamily="34" charset="0"/>
+                <a:ea typeface="Calibri" pitchFamily="34" charset="-122"/>
+                <a:cs typeface="Calibri" pitchFamily="34" charset="-120"/>
+              </a:rPr>
+              <a:t>Fullness is a smooth quantity that climbs and falls with the day; a fault is a discrete event — a gate stuck faulting, an inflow surge, a car dwelling far too long. A lot can be busy but perfectly healthy, or nearly empty yet faulted, so collapsing both into one number would hide whichever matters.</a:t>
+            </a:r>
+            <a:endParaRPr lang="en-US" sz="1450" dirty="0"/>
+          </a:p>
+        </p:txBody>
+      </p:sp>
+      <p:sp>
+        <p:nvSpPr>
+          <p:cNvPr id="6" name="Text 4"/>
+          <p:cNvSpPr/>
+          <p:nvPr/>
+        </p:nvSpPr>
+        <p:spPr>
+          <a:xfrm>
+            <a:off x="731520" y="4114800"/>
+            <a:ext cx="2377440" cy="548640"/>
+          </a:xfrm>
+          <a:prstGeom prst="rect">
+            <a:avLst/>
+          </a:prstGeom>
+          <a:noFill/>
+          <a:ln/>
+        </p:spPr>
+        <p:txBody>
+          <a:bodyPr wrap="square" lIns="0" tIns="0" rIns="0" bIns="0" rtlCol="0" anchor="ctr"/>
+          <a:lstStyle/>
+          <a:p>
+            <a:pPr indent="0" marL="0">
+              <a:buNone/>
+            </a:pPr>
+            <a:r>
+              <a:rPr lang="en-US" sz="2200" b="1" dirty="0">
+                <a:solidFill>
+                  <a:srgbClr val="8F79C0"/>
                 </a:solidFill>
                 <a:latin typeface="Century Schoolbook" pitchFamily="34" charset="0"/>
                 <a:ea typeface="Century Schoolbook" pitchFamily="34" charset="-122"/>
                 <a:cs typeface="Century Schoolbook" pitchFamily="34" charset="-120"/>
               </a:rPr>
-              <a:t>Problem</a:t>
-            </a:r>
-            <a:endParaRPr lang="en-US" sz="1900" dirty="0"/>
-          </a:p>
-        </p:txBody>
-      </p:sp>
-      <p:sp>
-        <p:nvSpPr>
-          <p:cNvPr id="5" name="Text 3"/>
-          <p:cNvSpPr/>
-          <p:nvPr/>
-        </p:nvSpPr>
-        <p:spPr>
-          <a:xfrm>
-            <a:off x="1005840" y="2578608"/>
-            <a:ext cx="9966960" cy="1188720"/>
-          </a:xfrm>
-          <a:prstGeom prst="rect">
-            <a:avLst/>
-          </a:prstGeom>
-          <a:noFill/>
-          <a:ln/>
-        </p:spPr>
-        <p:txBody>
-          <a:bodyPr wrap="square" lIns="0" tIns="0" rIns="0" bIns="0" rtlCol="0" anchor="ctr"/>
-          <a:lstStyle/>
-          <a:p>
-            <a:pPr indent="0" marL="0">
-              <a:lnSpc>
-                <a:spcPct val="105000"/>
-              </a:lnSpc>
-              <a:buNone/>
-            </a:pPr>
-            <a:r>
-              <a:rPr lang="en-US" sz="1300" dirty="0">
-                <a:solidFill>
-                  <a:srgbClr val="DBD0EC"/>
-                </a:solidFill>
-                <a:latin typeface="Calibri" pitchFamily="34" charset="0"/>
-                <a:ea typeface="Calibri" pitchFamily="34" charset="-122"/>
-                <a:cs typeface="Calibri" pitchFamily="34" charset="-120"/>
-              </a:rPr>
-              <a:t>Fullness is a smooth quantity that climbs and falls with the day; a fault is a discrete event — a gate stuck faulting, an inflow surge, a car dwelling far too long. A lot can be busy but perfectly healthy, or nearly empty yet faulted, so collapsing both into one number would hide whichever matters.</a:t>
-            </a:r>
-            <a:endParaRPr lang="en-US" sz="1300" dirty="0"/>
-          </a:p>
-        </p:txBody>
-      </p:sp>
-      <p:sp>
-        <p:nvSpPr>
-          <p:cNvPr id="6" name="Shape 4"/>
-          <p:cNvSpPr/>
-          <p:nvPr/>
-        </p:nvSpPr>
-        <p:spPr>
-          <a:xfrm>
-            <a:off x="731520" y="4041648"/>
-            <a:ext cx="10698480" cy="1965960"/>
-          </a:xfrm>
-          <a:prstGeom prst="roundRect">
-            <a:avLst>
-              <a:gd name="adj" fmla="val 4651"/>
-            </a:avLst>
-          </a:prstGeom>
-          <a:solidFill>
-            <a:srgbClr val="29223F"/>
-          </a:solidFill>
-          <a:ln w="15875">
+              <a:t>Solution</a:t>
+            </a:r>
+            <a:endParaRPr lang="en-US" sz="2200" dirty="0"/>
+          </a:p>
+        </p:txBody>
+      </p:sp>
+      <p:sp>
+        <p:nvSpPr>
+          <p:cNvPr id="7" name="Shape 5"/>
+          <p:cNvSpPr/>
+          <p:nvPr/>
+        </p:nvSpPr>
+        <p:spPr>
+          <a:xfrm>
+            <a:off x="3200400" y="4069080"/>
+            <a:ext cx="0" cy="1737360"/>
+          </a:xfrm>
+          <a:prstGeom prst="line">
+            <a:avLst/>
+          </a:prstGeom>
+          <a:noFill/>
+          <a:ln w="25400">
             <a:solidFill>
               <a:srgbClr val="8F79C0"/>
             </a:solidFill>
@@ -3325,53 +3395,14 @@
       </p:sp>
       <p:sp>
         <p:nvSpPr>
-          <p:cNvPr id="7" name="Text 5"/>
-          <p:cNvSpPr/>
-          <p:nvPr/>
-        </p:nvSpPr>
-        <p:spPr>
-          <a:xfrm>
-            <a:off x="1005840" y="4224528"/>
-            <a:ext cx="3657600" cy="457200"/>
-          </a:xfrm>
-          <a:prstGeom prst="rect">
-            <a:avLst/>
-          </a:prstGeom>
-          <a:noFill/>
-          <a:ln/>
-        </p:spPr>
-        <p:txBody>
-          <a:bodyPr wrap="square" lIns="0" tIns="0" rIns="0" bIns="0" rtlCol="0" anchor="ctr"/>
-          <a:lstStyle/>
-          <a:p>
-            <a:pPr indent="0" marL="0">
-              <a:buNone/>
-            </a:pPr>
-            <a:r>
-              <a:rPr lang="en-US" sz="1900" b="1" dirty="0">
-                <a:solidFill>
-                  <a:srgbClr val="8F79C0"/>
-                </a:solidFill>
-                <a:latin typeface="Century Schoolbook" pitchFamily="34" charset="0"/>
-                <a:ea typeface="Century Schoolbook" pitchFamily="34" charset="-122"/>
-                <a:cs typeface="Century Schoolbook" pitchFamily="34" charset="-120"/>
-              </a:rPr>
-              <a:t>Solution</a:t>
-            </a:r>
-            <a:endParaRPr lang="en-US" sz="1900" dirty="0"/>
-          </a:p>
-        </p:txBody>
-      </p:sp>
-      <p:sp>
-        <p:nvSpPr>
           <p:cNvPr id="8" name="Text 6"/>
           <p:cNvSpPr/>
           <p:nvPr/>
         </p:nvSpPr>
         <p:spPr>
           <a:xfrm>
-            <a:off x="1005840" y="4700016"/>
-            <a:ext cx="9966960" cy="1188720"/>
+            <a:off x="3474720" y="4069080"/>
+            <a:ext cx="7955280" cy="1874520"/>
           </a:xfrm>
           <a:prstGeom prst="rect">
             <a:avLst/>
@@ -3385,12 +3416,12 @@
           <a:p>
             <a:pPr indent="0" marL="0">
               <a:lnSpc>
-                <a:spcPct val="105000"/>
+                <a:spcPct val="110000"/>
               </a:lnSpc>
               <a:buNone/>
             </a:pPr>
             <a:r>
-              <a:rPr lang="en-US" sz="1300" dirty="0">
+              <a:rPr lang="en-US" sz="1450" dirty="0">
                 <a:solidFill>
                   <a:srgbClr val="DBD0EC"/>
                 </a:solidFill>
@@ -3400,7 +3431,7 @@
               </a:rPr>
               <a:t>Keep them on separate axes: the fog raises the four hard fault alarms at the edge, and the dashboard buckets each lot's latest occupancy into Quiet / Busy / Near-full on read. The two fuse into one badge where any active fault outranks the fullness tier, so an operator always sees the more urgent of the two at a glance. The tier is derived fresh on every read, never stored.</a:t>
             </a:r>
-            <a:endParaRPr lang="en-US" sz="1300" dirty="0"/>
+            <a:endParaRPr lang="en-US" sz="1450" dirty="0"/>
           </a:p>
         </p:txBody>
       </p:sp>

--- a/ppt/Pooja_X25120921_smart-parking-management.pptx
+++ b/ppt/Pooja_X25120921_smart-parking-management.pptx
@@ -3170,7 +3170,7 @@
     <p:bg>
       <p:bgPr>
         <a:solidFill>
-          <a:srgbClr val="1C1830"/>
+          <a:srgbClr val="FFFFFF"/>
         </a:solidFill>
       </p:bgPr>
     </p:bg>
@@ -3196,7 +3196,7 @@
         </p:nvSpPr>
         <p:spPr>
           <a:xfrm>
-            <a:off x="640080" y="594360"/>
+            <a:off x="640080" y="502920"/>
             <a:ext cx="10972800" cy="822960"/>
           </a:xfrm>
           <a:prstGeom prst="rect">
@@ -3215,7 +3215,7 @@
             <a:r>
               <a:rPr lang="en-US" sz="2800" b="1" dirty="0">
                 <a:solidFill>
-                  <a:srgbClr val="FFFFFF"/>
+                  <a:srgbClr val="1B1730"/>
                 </a:solidFill>
                 <a:latin typeface="Century Schoolbook" pitchFamily="34" charset="0"/>
                 <a:ea typeface="Century Schoolbook" pitchFamily="34" charset="-122"/>
@@ -3252,7 +3252,7 @@
               <a:buNone/>
             </a:pPr>
             <a:r>
-              <a:rPr lang="en-US" sz="2200" b="1" dirty="0">
+              <a:rPr lang="en-US" sz="2300" b="1" dirty="0">
                 <a:solidFill>
                   <a:srgbClr val="E3A93C"/>
                 </a:solidFill>
@@ -3262,7 +3262,7 @@
               </a:rPr>
               <a:t>Problem</a:t>
             </a:r>
-            <a:endParaRPr lang="en-US" sz="2200" dirty="0"/>
+            <a:endParaRPr lang="en-US" sz="2300" dirty="0"/>
           </a:p>
         </p:txBody>
       </p:sp>
@@ -3275,13 +3275,13 @@
         <p:spPr>
           <a:xfrm>
             <a:off x="3200400" y="1920240"/>
-            <a:ext cx="0" cy="1737360"/>
+            <a:ext cx="0" cy="1783080"/>
           </a:xfrm>
           <a:prstGeom prst="line">
             <a:avLst/>
           </a:prstGeom>
           <a:noFill/>
-          <a:ln w="25400">
+          <a:ln w="31750">
             <a:solidFill>
               <a:srgbClr val="E3A93C"/>
             </a:solidFill>
@@ -3298,7 +3298,7 @@
         <p:spPr>
           <a:xfrm>
             <a:off x="3474720" y="1920240"/>
-            <a:ext cx="7955280" cy="1874520"/>
+            <a:ext cx="7955280" cy="1920240"/>
           </a:xfrm>
           <a:prstGeom prst="rect">
             <a:avLst/>
@@ -3312,14 +3312,14 @@
           <a:p>
             <a:pPr indent="0" marL="0">
               <a:lnSpc>
-                <a:spcPct val="110000"/>
+                <a:spcPct val="112000"/>
               </a:lnSpc>
               <a:buNone/>
             </a:pPr>
             <a:r>
               <a:rPr lang="en-US" sz="1450" dirty="0">
                 <a:solidFill>
-                  <a:srgbClr val="DBD0EC"/>
+                  <a:srgbClr val="1B1730"/>
                 </a:solidFill>
                 <a:latin typeface="Calibri" pitchFamily="34" charset="0"/>
                 <a:ea typeface="Calibri" pitchFamily="34" charset="-122"/>
@@ -3356,9 +3356,9 @@
               <a:buNone/>
             </a:pPr>
             <a:r>
-              <a:rPr lang="en-US" sz="2200" b="1" dirty="0">
-                <a:solidFill>
-                  <a:srgbClr val="8F79C0"/>
+              <a:rPr lang="en-US" sz="2300" b="1" dirty="0">
+                <a:solidFill>
+                  <a:srgbClr val="6A51AB"/>
                 </a:solidFill>
                 <a:latin typeface="Century Schoolbook" pitchFamily="34" charset="0"/>
                 <a:ea typeface="Century Schoolbook" pitchFamily="34" charset="-122"/>
@@ -3366,7 +3366,7 @@
               </a:rPr>
               <a:t>Solution</a:t>
             </a:r>
-            <a:endParaRPr lang="en-US" sz="2200" dirty="0"/>
+            <a:endParaRPr lang="en-US" sz="2300" dirty="0"/>
           </a:p>
         </p:txBody>
       </p:sp>
@@ -3379,15 +3379,15 @@
         <p:spPr>
           <a:xfrm>
             <a:off x="3200400" y="4069080"/>
-            <a:ext cx="0" cy="1737360"/>
+            <a:ext cx="0" cy="1783080"/>
           </a:xfrm>
           <a:prstGeom prst="line">
             <a:avLst/>
           </a:prstGeom>
           <a:noFill/>
-          <a:ln w="25400">
+          <a:ln w="31750">
             <a:solidFill>
-              <a:srgbClr val="8F79C0"/>
+              <a:srgbClr val="6A51AB"/>
             </a:solidFill>
             <a:prstDash val="solid"/>
           </a:ln>
@@ -3402,7 +3402,7 @@
         <p:spPr>
           <a:xfrm>
             <a:off x="3474720" y="4069080"/>
-            <a:ext cx="7955280" cy="1874520"/>
+            <a:ext cx="7955280" cy="1920240"/>
           </a:xfrm>
           <a:prstGeom prst="rect">
             <a:avLst/>
@@ -3416,14 +3416,14 @@
           <a:p>
             <a:pPr indent="0" marL="0">
               <a:lnSpc>
-                <a:spcPct val="110000"/>
+                <a:spcPct val="112000"/>
               </a:lnSpc>
               <a:buNone/>
             </a:pPr>
             <a:r>
               <a:rPr lang="en-US" sz="1450" dirty="0">
                 <a:solidFill>
-                  <a:srgbClr val="DBD0EC"/>
+                  <a:srgbClr val="1B1730"/>
                 </a:solidFill>
                 <a:latin typeface="Calibri" pitchFamily="34" charset="0"/>
                 <a:ea typeface="Calibri" pitchFamily="34" charset="-122"/>

--- a/ppt/Pooja_X25120921_smart-parking-management.pptx
+++ b/ppt/Pooja_X25120921_smart-parking-management.pptx
@@ -1144,14 +1144,73 @@
       </p:grpSpPr>
       <p:sp>
         <p:nvSpPr>
-          <p:cNvPr id="2" name="Text 0"/>
-          <p:cNvSpPr/>
-          <p:nvPr/>
-        </p:nvSpPr>
-        <p:spPr>
-          <a:xfrm>
-            <a:off x="658368" y="640080"/>
-            <a:ext cx="10972800" cy="365760"/>
+          <p:cNvPr id="2" name="Shape 0"/>
+          <p:cNvSpPr/>
+          <p:nvPr/>
+        </p:nvSpPr>
+        <p:spPr>
+          <a:xfrm>
+            <a:off x="0" y="0"/>
+            <a:ext cx="12191695" cy="3931920"/>
+          </a:xfrm>
+          <a:prstGeom prst="rect">
+            <a:avLst/>
+          </a:prstGeom>
+          <a:solidFill>
+            <a:srgbClr val="4B2F83"/>
+          </a:solidFill>
+          <a:ln/>
+        </p:spPr>
+      </p:sp>
+      <p:sp>
+        <p:nvSpPr>
+          <p:cNvPr id="3" name="Text 1"/>
+          <p:cNvSpPr/>
+          <p:nvPr/>
+        </p:nvSpPr>
+        <p:spPr>
+          <a:xfrm>
+            <a:off x="640080" y="1005840"/>
+            <a:ext cx="10972800" cy="1554480"/>
+          </a:xfrm>
+          <a:prstGeom prst="rect">
+            <a:avLst/>
+          </a:prstGeom>
+          <a:noFill/>
+          <a:ln/>
+        </p:spPr>
+        <p:txBody>
+          <a:bodyPr wrap="square" rtlCol="0" anchor="t"/>
+          <a:lstStyle/>
+          <a:p>
+            <a:pPr indent="0" marL="0">
+              <a:buNone/>
+            </a:pPr>
+            <a:r>
+              <a:rPr lang="en-US" sz="4200" b="1" dirty="0">
+                <a:solidFill>
+                  <a:srgbClr val="FFFFFF"/>
+                </a:solidFill>
+                <a:latin typeface="Century Schoolbook" pitchFamily="34" charset="0"/>
+                <a:ea typeface="Century Schoolbook" pitchFamily="34" charset="-122"/>
+                <a:cs typeface="Century Schoolbook" pitchFamily="34" charset="-120"/>
+              </a:rPr>
+              <a:t>Smart Parking Management</a:t>
+            </a:r>
+            <a:endParaRPr lang="en-US" sz="4200" dirty="0"/>
+          </a:p>
+        </p:txBody>
+      </p:sp>
+      <p:sp>
+        <p:nvSpPr>
+          <p:cNvPr id="4" name="Text 2"/>
+          <p:cNvSpPr/>
+          <p:nvPr/>
+        </p:nvSpPr>
+        <p:spPr>
+          <a:xfrm>
+            <a:off x="658368" y="2880360"/>
+            <a:ext cx="10972800" cy="457200"/>
           </a:xfrm>
           <a:prstGeom prst="rect">
             <a:avLst/>
@@ -1167,92 +1226,14 @@
               <a:buNone/>
             </a:pPr>
             <a:r>
-              <a:rPr lang="en-US" sz="1400" b="1" spc="300" kern="0" dirty="0">
-                <a:solidFill>
-                  <a:srgbClr val="E3A93C"/>
+              <a:rPr lang="en-US" sz="1600" dirty="0">
+                <a:solidFill>
+                  <a:srgbClr val="DBD0EC"/>
                 </a:solidFill>
                 <a:latin typeface="Calibri" pitchFamily="34" charset="0"/>
                 <a:ea typeface="Calibri" pitchFamily="34" charset="-122"/>
                 <a:cs typeface="Calibri" pitchFamily="34" charset="-120"/>
               </a:rPr>
-              <a:t>SMART PARKING MANAGEMENT</a:t>
-            </a:r>
-            <a:endParaRPr lang="en-US" sz="1400" dirty="0"/>
-          </a:p>
-        </p:txBody>
-      </p:sp>
-      <p:sp>
-        <p:nvSpPr>
-          <p:cNvPr id="3" name="Text 1"/>
-          <p:cNvSpPr/>
-          <p:nvPr/>
-        </p:nvSpPr>
-        <p:spPr>
-          <a:xfrm>
-            <a:off x="640080" y="2514600"/>
-            <a:ext cx="10972800" cy="1188720"/>
-          </a:xfrm>
-          <a:prstGeom prst="rect">
-            <a:avLst/>
-          </a:prstGeom>
-          <a:noFill/>
-          <a:ln/>
-        </p:spPr>
-        <p:txBody>
-          <a:bodyPr wrap="square" rtlCol="0" anchor="ctr"/>
-          <a:lstStyle/>
-          <a:p>
-            <a:pPr indent="0" marL="0">
-              <a:buNone/>
-            </a:pPr>
-            <a:r>
-              <a:rPr lang="en-US" sz="4200" b="1" dirty="0">
-                <a:solidFill>
-                  <a:srgbClr val="FFFFFF"/>
-                </a:solidFill>
-                <a:latin typeface="Century Schoolbook" pitchFamily="34" charset="0"/>
-                <a:ea typeface="Century Schoolbook" pitchFamily="34" charset="-122"/>
-                <a:cs typeface="Century Schoolbook" pitchFamily="34" charset="-120"/>
-              </a:rPr>
-              <a:t>Smart Parking Management</a:t>
-            </a:r>
-            <a:endParaRPr lang="en-US" sz="4200" dirty="0"/>
-          </a:p>
-        </p:txBody>
-      </p:sp>
-      <p:sp>
-        <p:nvSpPr>
-          <p:cNvPr id="4" name="Text 2"/>
-          <p:cNvSpPr/>
-          <p:nvPr/>
-        </p:nvSpPr>
-        <p:spPr>
-          <a:xfrm>
-            <a:off x="658368" y="3703320"/>
-            <a:ext cx="10972800" cy="365760"/>
-          </a:xfrm>
-          <a:prstGeom prst="rect">
-            <a:avLst/>
-          </a:prstGeom>
-          <a:noFill/>
-          <a:ln/>
-        </p:spPr>
-        <p:txBody>
-          <a:bodyPr wrap="square" rtlCol="0" anchor="ctr"/>
-          <a:lstStyle/>
-          <a:p>
-            <a:pPr indent="0" marL="0">
-              <a:buNone/>
-            </a:pPr>
-            <a:r>
-              <a:rPr lang="en-US" sz="1600" dirty="0">
-                <a:solidFill>
-                  <a:srgbClr val="8F79C0"/>
-                </a:solidFill>
-                <a:latin typeface="Calibri" pitchFamily="34" charset="0"/>
-                <a:ea typeface="Calibri" pitchFamily="34" charset="-122"/>
-                <a:cs typeface="Calibri" pitchFamily="34" charset="-120"/>
-              </a:rPr>
               <a:t>Pooja   ·   X25120921</a:t>
             </a:r>
             <a:endParaRPr lang="en-US" sz="1600" dirty="0"/>
@@ -1267,8 +1248,8 @@
         </p:nvSpPr>
         <p:spPr>
           <a:xfrm>
-            <a:off x="658368" y="4251960"/>
-            <a:ext cx="10424160" cy="1188720"/>
+            <a:off x="658368" y="4206240"/>
+            <a:ext cx="10424160" cy="1280160"/>
           </a:xfrm>
           <a:prstGeom prst="rect">
             <a:avLst/>
@@ -1309,7 +1290,7 @@
         </p:nvSpPr>
         <p:spPr>
           <a:xfrm>
-            <a:off x="658368" y="5623560"/>
+            <a:off x="658368" y="5577840"/>
             <a:ext cx="2651760" cy="566928"/>
           </a:xfrm>
           <a:prstGeom prst="roundRect">
@@ -1336,7 +1317,7 @@
         </p:nvSpPr>
         <p:spPr>
           <a:xfrm>
-            <a:off x="658368" y="5623560"/>
+            <a:off x="658368" y="5577840"/>
             <a:ext cx="2651760" cy="566928"/>
           </a:xfrm>
           <a:prstGeom prst="rect">
@@ -1375,7 +1356,7 @@
         </p:nvSpPr>
         <p:spPr>
           <a:xfrm>
-            <a:off x="3538728" y="5623560"/>
+            <a:off x="3538728" y="5577840"/>
             <a:ext cx="2651760" cy="566928"/>
           </a:xfrm>
           <a:prstGeom prst="roundRect">
@@ -1402,7 +1383,7 @@
         </p:nvSpPr>
         <p:spPr>
           <a:xfrm>
-            <a:off x="3538728" y="5623560"/>
+            <a:off x="3538728" y="5577840"/>
             <a:ext cx="2651760" cy="566928"/>
           </a:xfrm>
           <a:prstGeom prst="rect">
@@ -1441,7 +1422,7 @@
         </p:nvSpPr>
         <p:spPr>
           <a:xfrm>
-            <a:off x="6419088" y="5623560"/>
+            <a:off x="6419088" y="5577840"/>
             <a:ext cx="2651760" cy="566928"/>
           </a:xfrm>
           <a:prstGeom prst="roundRect">
@@ -1468,7 +1449,7 @@
         </p:nvSpPr>
         <p:spPr>
           <a:xfrm>
-            <a:off x="6419088" y="5623560"/>
+            <a:off x="6419088" y="5577840"/>
             <a:ext cx="2651760" cy="566928"/>
           </a:xfrm>
           <a:prstGeom prst="rect">
@@ -1617,12 +1598,12 @@
         </p:nvSpPr>
         <p:spPr>
           <a:xfrm>
-            <a:off x="640080" y="2468880"/>
-            <a:ext cx="1572768" cy="1371600"/>
+            <a:off x="640080" y="1554480"/>
+            <a:ext cx="3200400" cy="3383280"/>
           </a:xfrm>
           <a:prstGeom prst="roundRect">
             <a:avLst>
-              <a:gd name="adj" fmla="val 6667"/>
+              <a:gd name="adj" fmla="val 2857"/>
             </a:avLst>
           </a:prstGeom>
           <a:solidFill>
@@ -1638,146 +1619,63 @@
       </p:sp>
       <p:sp>
         <p:nvSpPr>
-          <p:cNvPr id="4" name="Shape 2"/>
-          <p:cNvSpPr/>
-          <p:nvPr/>
-        </p:nvSpPr>
-        <p:spPr>
-          <a:xfrm>
-            <a:off x="1335024" y="2633472"/>
-            <a:ext cx="182880" cy="182880"/>
-          </a:xfrm>
-          <a:prstGeom prst="ellipse">
-            <a:avLst/>
-          </a:prstGeom>
-          <a:solidFill>
-            <a:srgbClr val="8F79C0"/>
-          </a:solidFill>
-          <a:ln/>
-        </p:spPr>
-      </p:sp>
-      <p:sp>
-        <p:nvSpPr>
-          <p:cNvPr id="5" name="Text 3"/>
-          <p:cNvSpPr/>
-          <p:nvPr/>
-        </p:nvSpPr>
-        <p:spPr>
-          <a:xfrm>
-            <a:off x="612648" y="2852928"/>
-            <a:ext cx="1627632" cy="365760"/>
-          </a:xfrm>
-          <a:prstGeom prst="rect">
-            <a:avLst/>
-          </a:prstGeom>
-          <a:noFill/>
-          <a:ln/>
-        </p:spPr>
-        <p:txBody>
-          <a:bodyPr wrap="square" lIns="0" tIns="0" rIns="0" bIns="0" rtlCol="0" anchor="ctr"/>
+          <p:cNvPr id="4" name="Text 2"/>
+          <p:cNvSpPr/>
+          <p:nvPr/>
+        </p:nvSpPr>
+        <p:spPr>
+          <a:xfrm>
+            <a:off x="640080" y="1691640"/>
+            <a:ext cx="3200400" cy="365760"/>
+          </a:xfrm>
+          <a:prstGeom prst="rect">
+            <a:avLst/>
+          </a:prstGeom>
+          <a:noFill/>
+          <a:ln/>
+        </p:spPr>
+        <p:txBody>
+          <a:bodyPr wrap="square" rtlCol="0" anchor="ctr"/>
           <a:lstStyle/>
           <a:p>
             <a:pPr algn="ctr" indent="0" marL="0">
               <a:buNone/>
             </a:pPr>
             <a:r>
-              <a:rPr lang="en-US" sz="1450" b="1" dirty="0">
-                <a:solidFill>
-                  <a:srgbClr val="1B1730"/>
+              <a:rPr lang="en-US" sz="1200" b="1" spc="300" kern="0" dirty="0">
+                <a:solidFill>
+                  <a:srgbClr val="8F79C0"/>
                 </a:solidFill>
                 <a:latin typeface="Calibri" pitchFamily="34" charset="0"/>
                 <a:ea typeface="Calibri" pitchFamily="34" charset="-122"/>
                 <a:cs typeface="Calibri" pitchFamily="34" charset="-120"/>
               </a:rPr>
-              <a:t>Lot sensors</a:t>
-            </a:r>
-            <a:endParaRPr lang="en-US" sz="1450" dirty="0"/>
-          </a:p>
-        </p:txBody>
-      </p:sp>
-      <p:sp>
-        <p:nvSpPr>
-          <p:cNvPr id="6" name="Text 4"/>
-          <p:cNvSpPr/>
-          <p:nvPr/>
-        </p:nvSpPr>
-        <p:spPr>
-          <a:xfrm>
-            <a:off x="640080" y="3200400"/>
-            <a:ext cx="1572768" cy="411480"/>
-          </a:xfrm>
-          <a:prstGeom prst="rect">
-            <a:avLst/>
-          </a:prstGeom>
-          <a:noFill/>
-          <a:ln/>
-        </p:spPr>
-        <p:txBody>
-          <a:bodyPr wrap="square" lIns="0" tIns="0" rIns="0" bIns="0" rtlCol="0" anchor="t"/>
-          <a:lstStyle/>
-          <a:p>
-            <a:pPr algn="ctr" indent="0" marL="0">
-              <a:buNone/>
-            </a:pPr>
-            <a:r>
-              <a:rPr lang="en-US" sz="1050" dirty="0">
-                <a:solidFill>
-                  <a:srgbClr val="665F78"/>
-                </a:solidFill>
-                <a:latin typeface="Calibri" pitchFamily="34" charset="0"/>
-                <a:ea typeface="Calibri" pitchFamily="34" charset="-122"/>
-                <a:cs typeface="Calibri" pitchFamily="34" charset="-120"/>
-              </a:rPr>
-              <a:t>10 · 2 lots</a:t>
-            </a:r>
-            <a:endParaRPr lang="en-US" sz="1050" dirty="0"/>
-          </a:p>
-        </p:txBody>
-      </p:sp>
-      <p:sp>
-        <p:nvSpPr>
-          <p:cNvPr id="7" name="Shape 5"/>
-          <p:cNvSpPr/>
-          <p:nvPr/>
-        </p:nvSpPr>
-        <p:spPr>
-          <a:xfrm>
-            <a:off x="2231136" y="3154680"/>
-            <a:ext cx="258409" cy="0"/>
-          </a:xfrm>
-          <a:prstGeom prst="line">
-            <a:avLst/>
-          </a:prstGeom>
-          <a:noFill/>
-          <a:ln w="25400">
-            <a:solidFill>
-              <a:srgbClr val="8F79C0"/>
-            </a:solidFill>
-            <a:prstDash val="solid"/>
-            <a:tailEnd type="triangle"/>
-          </a:ln>
-        </p:spPr>
-      </p:sp>
-      <p:sp>
-        <p:nvSpPr>
-          <p:cNvPr id="8" name="Shape 6"/>
-          <p:cNvSpPr/>
-          <p:nvPr/>
-        </p:nvSpPr>
-        <p:spPr>
-          <a:xfrm>
-            <a:off x="2507833" y="2468880"/>
-            <a:ext cx="1572768" cy="1371600"/>
+              <a:t>EDGE</a:t>
+            </a:r>
+            <a:endParaRPr lang="en-US" sz="1200" dirty="0"/>
+          </a:p>
+        </p:txBody>
+      </p:sp>
+      <p:sp>
+        <p:nvSpPr>
+          <p:cNvPr id="5" name="Shape 3"/>
+          <p:cNvSpPr/>
+          <p:nvPr/>
+        </p:nvSpPr>
+        <p:spPr>
+          <a:xfrm>
+            <a:off x="914400" y="2286000"/>
+            <a:ext cx="2651760" cy="1005840"/>
           </a:xfrm>
           <a:prstGeom prst="roundRect">
             <a:avLst>
-              <a:gd name="adj" fmla="val 6667"/>
+              <a:gd name="adj" fmla="val 7273"/>
             </a:avLst>
           </a:prstGeom>
           <a:solidFill>
-            <a:srgbClr val="F1EEF8"/>
+            <a:srgbClr val="FFFFFF"/>
           </a:solidFill>
-          <a:ln w="19050">
+          <a:ln w="15240">
             <a:solidFill>
               <a:srgbClr val="8F79C0"/>
             </a:solidFill>
@@ -1787,34 +1685,14 @@
       </p:sp>
       <p:sp>
         <p:nvSpPr>
-          <p:cNvPr id="9" name="Shape 7"/>
-          <p:cNvSpPr/>
-          <p:nvPr/>
-        </p:nvSpPr>
-        <p:spPr>
-          <a:xfrm>
-            <a:off x="3202777" y="2633472"/>
-            <a:ext cx="182880" cy="182880"/>
-          </a:xfrm>
-          <a:prstGeom prst="ellipse">
-            <a:avLst/>
-          </a:prstGeom>
-          <a:solidFill>
-            <a:srgbClr val="8F79C0"/>
-          </a:solidFill>
-          <a:ln/>
-        </p:spPr>
-      </p:sp>
-      <p:sp>
-        <p:nvSpPr>
-          <p:cNvPr id="10" name="Text 8"/>
-          <p:cNvSpPr/>
-          <p:nvPr/>
-        </p:nvSpPr>
-        <p:spPr>
-          <a:xfrm>
-            <a:off x="2480401" y="2852928"/>
-            <a:ext cx="1627632" cy="365760"/>
+          <p:cNvPr id="6" name="Text 4"/>
+          <p:cNvSpPr/>
+          <p:nvPr/>
+        </p:nvSpPr>
+        <p:spPr>
+          <a:xfrm>
+            <a:off x="914400" y="2432304"/>
+            <a:ext cx="2651760" cy="365760"/>
           </a:xfrm>
           <a:prstGeom prst="rect">
             <a:avLst/>
@@ -1830,7 +1708,7 @@
               <a:buNone/>
             </a:pPr>
             <a:r>
-              <a:rPr lang="en-US" sz="1450" b="1" dirty="0">
+              <a:rPr lang="en-US" sz="1400" b="1" dirty="0">
                 <a:solidFill>
                   <a:srgbClr val="1B1730"/>
                 </a:solidFill>
@@ -1838,38 +1716,38 @@
                 <a:ea typeface="Calibri" pitchFamily="34" charset="-122"/>
                 <a:cs typeface="Calibri" pitchFamily="34" charset="-120"/>
               </a:rPr>
-              <a:t>Fog node</a:t>
-            </a:r>
-            <a:endParaRPr lang="en-US" sz="1450" dirty="0"/>
-          </a:p>
-        </p:txBody>
-      </p:sp>
-      <p:sp>
-        <p:nvSpPr>
-          <p:cNvPr id="11" name="Text 9"/>
-          <p:cNvSpPr/>
-          <p:nvPr/>
-        </p:nvSpPr>
-        <p:spPr>
-          <a:xfrm>
-            <a:off x="2507833" y="3200400"/>
-            <a:ext cx="1572768" cy="411480"/>
-          </a:xfrm>
-          <a:prstGeom prst="rect">
-            <a:avLst/>
-          </a:prstGeom>
-          <a:noFill/>
-          <a:ln/>
-        </p:spPr>
-        <p:txBody>
-          <a:bodyPr wrap="square" lIns="0" tIns="0" rIns="0" bIns="0" rtlCol="0" anchor="t"/>
+              <a:t>Lot sensors</a:t>
+            </a:r>
+            <a:endParaRPr lang="en-US" sz="1400" dirty="0"/>
+          </a:p>
+        </p:txBody>
+      </p:sp>
+      <p:sp>
+        <p:nvSpPr>
+          <p:cNvPr id="7" name="Text 5"/>
+          <p:cNvSpPr/>
+          <p:nvPr/>
+        </p:nvSpPr>
+        <p:spPr>
+          <a:xfrm>
+            <a:off x="914400" y="2816352"/>
+            <a:ext cx="2651760" cy="365760"/>
+          </a:xfrm>
+          <a:prstGeom prst="rect">
+            <a:avLst/>
+          </a:prstGeom>
+          <a:noFill/>
+          <a:ln/>
+        </p:spPr>
+        <p:txBody>
+          <a:bodyPr wrap="square" lIns="0" tIns="0" rIns="0" bIns="0" rtlCol="0" anchor="ctr"/>
           <a:lstStyle/>
           <a:p>
             <a:pPr algn="ctr" indent="0" marL="0">
               <a:buNone/>
             </a:pPr>
             <a:r>
-              <a:rPr lang="en-US" sz="1050" dirty="0">
+              <a:rPr lang="en-US" sz="1000" dirty="0">
                 <a:solidFill>
                   <a:srgbClr val="665F78"/>
                 </a:solidFill>
@@ -1877,50 +1755,155 @@
                 <a:ea typeface="Calibri" pitchFamily="34" charset="-122"/>
                 <a:cs typeface="Calibri" pitchFamily="34" charset="-120"/>
               </a:rPr>
-              <a:t>window · fault alarms</a:t>
-            </a:r>
-            <a:endParaRPr lang="en-US" sz="1050" dirty="0"/>
-          </a:p>
-        </p:txBody>
-      </p:sp>
-      <p:sp>
-        <p:nvSpPr>
-          <p:cNvPr id="12" name="Shape 10"/>
-          <p:cNvSpPr/>
-          <p:nvPr/>
-        </p:nvSpPr>
-        <p:spPr>
-          <a:xfrm>
-            <a:off x="4098889" y="3154680"/>
-            <a:ext cx="258409" cy="0"/>
-          </a:xfrm>
-          <a:prstGeom prst="line">
-            <a:avLst/>
-          </a:prstGeom>
-          <a:noFill/>
-          <a:ln w="25400">
+              <a:t>10 · 2 lots</a:t>
+            </a:r>
+            <a:endParaRPr lang="en-US" sz="1000" dirty="0"/>
+          </a:p>
+        </p:txBody>
+      </p:sp>
+      <p:sp>
+        <p:nvSpPr>
+          <p:cNvPr id="8" name="Shape 6"/>
+          <p:cNvSpPr/>
+          <p:nvPr/>
+        </p:nvSpPr>
+        <p:spPr>
+          <a:xfrm>
+            <a:off x="914400" y="3520440"/>
+            <a:ext cx="2651760" cy="1005840"/>
+          </a:xfrm>
+          <a:prstGeom prst="roundRect">
+            <a:avLst>
+              <a:gd name="adj" fmla="val 7273"/>
+            </a:avLst>
+          </a:prstGeom>
+          <a:solidFill>
+            <a:srgbClr val="FFFFFF"/>
+          </a:solidFill>
+          <a:ln w="15240">
             <a:solidFill>
               <a:srgbClr val="8F79C0"/>
             </a:solidFill>
             <a:prstDash val="solid"/>
+          </a:ln>
+        </p:spPr>
+      </p:sp>
+      <p:sp>
+        <p:nvSpPr>
+          <p:cNvPr id="9" name="Text 7"/>
+          <p:cNvSpPr/>
+          <p:nvPr/>
+        </p:nvSpPr>
+        <p:spPr>
+          <a:xfrm>
+            <a:off x="914400" y="3666744"/>
+            <a:ext cx="2651760" cy="365760"/>
+          </a:xfrm>
+          <a:prstGeom prst="rect">
+            <a:avLst/>
+          </a:prstGeom>
+          <a:noFill/>
+          <a:ln/>
+        </p:spPr>
+        <p:txBody>
+          <a:bodyPr wrap="square" lIns="0" tIns="0" rIns="0" bIns="0" rtlCol="0" anchor="ctr"/>
+          <a:lstStyle/>
+          <a:p>
+            <a:pPr algn="ctr" indent="0" marL="0">
+              <a:buNone/>
+            </a:pPr>
+            <a:r>
+              <a:rPr lang="en-US" sz="1400" b="1" dirty="0">
+                <a:solidFill>
+                  <a:srgbClr val="1B1730"/>
+                </a:solidFill>
+                <a:latin typeface="Calibri" pitchFamily="34" charset="0"/>
+                <a:ea typeface="Calibri" pitchFamily="34" charset="-122"/>
+                <a:cs typeface="Calibri" pitchFamily="34" charset="-120"/>
+              </a:rPr>
+              <a:t>Fog node</a:t>
+            </a:r>
+            <a:endParaRPr lang="en-US" sz="1400" dirty="0"/>
+          </a:p>
+        </p:txBody>
+      </p:sp>
+      <p:sp>
+        <p:nvSpPr>
+          <p:cNvPr id="10" name="Text 8"/>
+          <p:cNvSpPr/>
+          <p:nvPr/>
+        </p:nvSpPr>
+        <p:spPr>
+          <a:xfrm>
+            <a:off x="914400" y="4050792"/>
+            <a:ext cx="2651760" cy="365760"/>
+          </a:xfrm>
+          <a:prstGeom prst="rect">
+            <a:avLst/>
+          </a:prstGeom>
+          <a:noFill/>
+          <a:ln/>
+        </p:spPr>
+        <p:txBody>
+          <a:bodyPr wrap="square" lIns="0" tIns="0" rIns="0" bIns="0" rtlCol="0" anchor="ctr"/>
+          <a:lstStyle/>
+          <a:p>
+            <a:pPr algn="ctr" indent="0" marL="0">
+              <a:buNone/>
+            </a:pPr>
+            <a:r>
+              <a:rPr lang="en-US" sz="1000" dirty="0">
+                <a:solidFill>
+                  <a:srgbClr val="665F78"/>
+                </a:solidFill>
+                <a:latin typeface="Calibri" pitchFamily="34" charset="0"/>
+                <a:ea typeface="Calibri" pitchFamily="34" charset="-122"/>
+                <a:cs typeface="Calibri" pitchFamily="34" charset="-120"/>
+              </a:rPr>
+              <a:t>window · fault alarms</a:t>
+            </a:r>
+            <a:endParaRPr lang="en-US" sz="1000" dirty="0"/>
+          </a:p>
+        </p:txBody>
+      </p:sp>
+      <p:sp>
+        <p:nvSpPr>
+          <p:cNvPr id="11" name="Shape 9"/>
+          <p:cNvSpPr/>
+          <p:nvPr/>
+        </p:nvSpPr>
+        <p:spPr>
+          <a:xfrm>
+            <a:off x="3886200" y="3246120"/>
+            <a:ext cx="502920" cy="0"/>
+          </a:xfrm>
+          <a:prstGeom prst="line">
+            <a:avLst/>
+          </a:prstGeom>
+          <a:noFill/>
+          <a:ln w="31750">
+            <a:solidFill>
+              <a:srgbClr val="4B2F83"/>
+            </a:solidFill>
+            <a:prstDash val="solid"/>
             <a:tailEnd type="triangle"/>
           </a:ln>
         </p:spPr>
       </p:sp>
       <p:sp>
         <p:nvSpPr>
-          <p:cNvPr id="13" name="Shape 11"/>
-          <p:cNvSpPr/>
-          <p:nvPr/>
-        </p:nvSpPr>
-        <p:spPr>
-          <a:xfrm>
-            <a:off x="4375587" y="2468880"/>
-            <a:ext cx="1572768" cy="1371600"/>
+          <p:cNvPr id="12" name="Shape 10"/>
+          <p:cNvSpPr/>
+          <p:nvPr/>
+        </p:nvSpPr>
+        <p:spPr>
+          <a:xfrm>
+            <a:off x="4572000" y="1554480"/>
+            <a:ext cx="6949440" cy="3383280"/>
           </a:xfrm>
           <a:prstGeom prst="roundRect">
             <a:avLst>
-              <a:gd name="adj" fmla="val 6667"/>
+              <a:gd name="adj" fmla="val 2703"/>
             </a:avLst>
           </a:prstGeom>
           <a:solidFill>
@@ -1936,99 +1919,145 @@
       </p:sp>
       <p:sp>
         <p:nvSpPr>
-          <p:cNvPr id="14" name="Shape 12"/>
-          <p:cNvSpPr/>
-          <p:nvPr/>
-        </p:nvSpPr>
-        <p:spPr>
-          <a:xfrm>
-            <a:off x="5070531" y="2633472"/>
-            <a:ext cx="182880" cy="182880"/>
-          </a:xfrm>
-          <a:prstGeom prst="ellipse">
-            <a:avLst/>
-          </a:prstGeom>
-          <a:solidFill>
-            <a:srgbClr val="4B2F83"/>
-          </a:solidFill>
-          <a:ln/>
-        </p:spPr>
-      </p:sp>
-      <p:sp>
-        <p:nvSpPr>
-          <p:cNvPr id="15" name="Text 13"/>
-          <p:cNvSpPr/>
-          <p:nvPr/>
-        </p:nvSpPr>
-        <p:spPr>
-          <a:xfrm>
-            <a:off x="4348155" y="2852928"/>
-            <a:ext cx="1627632" cy="365760"/>
-          </a:xfrm>
-          <a:prstGeom prst="rect">
-            <a:avLst/>
-          </a:prstGeom>
-          <a:noFill/>
-          <a:ln/>
-        </p:spPr>
-        <p:txBody>
-          <a:bodyPr wrap="square" lIns="0" tIns="0" rIns="0" bIns="0" rtlCol="0" anchor="ctr"/>
+          <p:cNvPr id="13" name="Text 11"/>
+          <p:cNvSpPr/>
+          <p:nvPr/>
+        </p:nvSpPr>
+        <p:spPr>
+          <a:xfrm>
+            <a:off x="4572000" y="1691640"/>
+            <a:ext cx="6949440" cy="365760"/>
+          </a:xfrm>
+          <a:prstGeom prst="rect">
+            <a:avLst/>
+          </a:prstGeom>
+          <a:noFill/>
+          <a:ln/>
+        </p:spPr>
+        <p:txBody>
+          <a:bodyPr wrap="square" rtlCol="0" anchor="ctr"/>
           <a:lstStyle/>
           <a:p>
             <a:pPr algn="ctr" indent="0" marL="0">
               <a:buNone/>
             </a:pPr>
             <a:r>
-              <a:rPr lang="en-US" sz="1450" b="1" dirty="0">
-                <a:solidFill>
-                  <a:srgbClr val="1B1730"/>
+              <a:rPr lang="en-US" sz="1200" b="1" spc="200" kern="0" dirty="0">
+                <a:solidFill>
+                  <a:srgbClr val="4B2F83"/>
                 </a:solidFill>
                 <a:latin typeface="Calibri" pitchFamily="34" charset="0"/>
                 <a:ea typeface="Calibri" pitchFamily="34" charset="-122"/>
                 <a:cs typeface="Calibri" pitchFamily="34" charset="-120"/>
               </a:rPr>
-              <a:t>Amazon SQS</a:t>
-            </a:r>
-            <a:endParaRPr lang="en-US" sz="1450" dirty="0"/>
-          </a:p>
-        </p:txBody>
-      </p:sp>
-      <p:sp>
-        <p:nvSpPr>
-          <p:cNvPr id="16" name="Text 14"/>
-          <p:cNvSpPr/>
-          <p:nvPr/>
-        </p:nvSpPr>
-        <p:spPr>
-          <a:xfrm>
-            <a:off x="4375587" y="3200400"/>
-            <a:ext cx="1572768" cy="411480"/>
-          </a:xfrm>
-          <a:prstGeom prst="rect">
-            <a:avLst/>
-          </a:prstGeom>
-          <a:noFill/>
-          <a:ln/>
-        </p:spPr>
-        <p:txBody>
-          <a:bodyPr wrap="square" lIns="0" tIns="0" rIns="0" bIns="0" rtlCol="0" anchor="t"/>
+              <a:t>CLOUD (serverless)</a:t>
+            </a:r>
+            <a:endParaRPr lang="en-US" sz="1200" dirty="0"/>
+          </a:p>
+        </p:txBody>
+      </p:sp>
+      <p:sp>
+        <p:nvSpPr>
+          <p:cNvPr id="14" name="Shape 12"/>
+          <p:cNvSpPr/>
+          <p:nvPr/>
+        </p:nvSpPr>
+        <p:spPr>
+          <a:xfrm>
+            <a:off x="4846320" y="2651760"/>
+            <a:ext cx="1463040" cy="1371600"/>
+          </a:xfrm>
+          <a:prstGeom prst="roundRect">
+            <a:avLst>
+              <a:gd name="adj" fmla="val 5333"/>
+            </a:avLst>
+          </a:prstGeom>
+          <a:solidFill>
+            <a:srgbClr val="FFFFFF"/>
+          </a:solidFill>
+          <a:ln w="15240">
+            <a:solidFill>
+              <a:srgbClr val="4B2F83"/>
+            </a:solidFill>
+            <a:prstDash val="solid"/>
+          </a:ln>
+        </p:spPr>
+      </p:sp>
+      <p:sp>
+        <p:nvSpPr>
+          <p:cNvPr id="15" name="Text 13"/>
+          <p:cNvSpPr/>
+          <p:nvPr/>
+        </p:nvSpPr>
+        <p:spPr>
+          <a:xfrm>
+            <a:off x="4800600" y="2907792"/>
+            <a:ext cx="1554480" cy="457200"/>
+          </a:xfrm>
+          <a:prstGeom prst="rect">
+            <a:avLst/>
+          </a:prstGeom>
+          <a:noFill/>
+          <a:ln/>
+        </p:spPr>
+        <p:txBody>
+          <a:bodyPr wrap="square" lIns="0" tIns="0" rIns="0" bIns="0" rtlCol="0" anchor="ctr"/>
           <a:lstStyle/>
           <a:p>
             <a:pPr algn="ctr" indent="0" marL="0">
               <a:buNone/>
             </a:pPr>
             <a:r>
-              <a:rPr lang="en-US" sz="1050" dirty="0">
-                <a:solidFill>
-                  <a:srgbClr val="665F78"/>
+              <a:rPr lang="en-US" sz="1250" b="1" dirty="0">
+                <a:solidFill>
+                  <a:srgbClr val="1B1730"/>
                 </a:solidFill>
                 <a:latin typeface="Calibri" pitchFamily="34" charset="0"/>
                 <a:ea typeface="Calibri" pitchFamily="34" charset="-122"/>
                 <a:cs typeface="Calibri" pitchFamily="34" charset="-120"/>
               </a:rPr>
+              <a:t>Amazon SQS</a:t>
+            </a:r>
+            <a:endParaRPr lang="en-US" sz="1250" dirty="0"/>
+          </a:p>
+        </p:txBody>
+      </p:sp>
+      <p:sp>
+        <p:nvSpPr>
+          <p:cNvPr id="16" name="Text 14"/>
+          <p:cNvSpPr/>
+          <p:nvPr/>
+        </p:nvSpPr>
+        <p:spPr>
+          <a:xfrm>
+            <a:off x="4828032" y="3401568"/>
+            <a:ext cx="1499616" cy="457200"/>
+          </a:xfrm>
+          <a:prstGeom prst="rect">
+            <a:avLst/>
+          </a:prstGeom>
+          <a:noFill/>
+          <a:ln/>
+        </p:spPr>
+        <p:txBody>
+          <a:bodyPr wrap="square" lIns="0" tIns="0" rIns="0" bIns="0" rtlCol="0" anchor="ctr"/>
+          <a:lstStyle/>
+          <a:p>
+            <a:pPr algn="ctr" indent="0" marL="0">
+              <a:buNone/>
+            </a:pPr>
+            <a:r>
+              <a:rPr lang="en-US" sz="900" dirty="0">
+                <a:solidFill>
+                  <a:srgbClr val="665F78"/>
+                </a:solidFill>
+                <a:latin typeface="Calibri" pitchFamily="34" charset="0"/>
+                <a:ea typeface="Calibri" pitchFamily="34" charset="-122"/>
+                <a:cs typeface="Calibri" pitchFamily="34" charset="-120"/>
+              </a:rPr>
               <a:t>aggregate queue</a:t>
             </a:r>
-            <a:endParaRPr lang="en-US" sz="1050" dirty="0"/>
+            <a:endParaRPr lang="en-US" sz="900" dirty="0"/>
           </a:p>
         </p:txBody>
       </p:sp>
@@ -2040,14 +2069,14 @@
         </p:nvSpPr>
         <p:spPr>
           <a:xfrm>
-            <a:off x="5966643" y="3154680"/>
-            <a:ext cx="258409" cy="0"/>
+            <a:off x="6318504" y="3337560"/>
+            <a:ext cx="164592" cy="0"/>
           </a:xfrm>
           <a:prstGeom prst="line">
             <a:avLst/>
           </a:prstGeom>
           <a:noFill/>
-          <a:ln w="25400">
+          <a:ln w="20320">
             <a:solidFill>
               <a:srgbClr val="8F79C0"/>
             </a:solidFill>
@@ -2064,18 +2093,18 @@
         </p:nvSpPr>
         <p:spPr>
           <a:xfrm>
-            <a:off x="6243340" y="2468880"/>
-            <a:ext cx="1572768" cy="1371600"/>
+            <a:off x="6492240" y="2651760"/>
+            <a:ext cx="1463040" cy="1371600"/>
           </a:xfrm>
           <a:prstGeom prst="roundRect">
             <a:avLst>
-              <a:gd name="adj" fmla="val 6667"/>
+              <a:gd name="adj" fmla="val 5333"/>
             </a:avLst>
           </a:prstGeom>
           <a:solidFill>
-            <a:srgbClr val="F1EEF8"/>
+            <a:srgbClr val="FFFFFF"/>
           </a:solidFill>
-          <a:ln w="19050">
+          <a:ln w="15240">
             <a:solidFill>
               <a:srgbClr val="4B2F83"/>
             </a:solidFill>
@@ -2085,34 +2114,14 @@
       </p:sp>
       <p:sp>
         <p:nvSpPr>
-          <p:cNvPr id="19" name="Shape 17"/>
-          <p:cNvSpPr/>
-          <p:nvPr/>
-        </p:nvSpPr>
-        <p:spPr>
-          <a:xfrm>
-            <a:off x="6938284" y="2633472"/>
-            <a:ext cx="182880" cy="182880"/>
-          </a:xfrm>
-          <a:prstGeom prst="ellipse">
-            <a:avLst/>
-          </a:prstGeom>
-          <a:solidFill>
-            <a:srgbClr val="4B2F83"/>
-          </a:solidFill>
-          <a:ln/>
-        </p:spPr>
-      </p:sp>
-      <p:sp>
-        <p:nvSpPr>
-          <p:cNvPr id="20" name="Text 18"/>
-          <p:cNvSpPr/>
-          <p:nvPr/>
-        </p:nvSpPr>
-        <p:spPr>
-          <a:xfrm>
-            <a:off x="6215908" y="2852928"/>
-            <a:ext cx="1627632" cy="365760"/>
+          <p:cNvPr id="19" name="Text 17"/>
+          <p:cNvSpPr/>
+          <p:nvPr/>
+        </p:nvSpPr>
+        <p:spPr>
+          <a:xfrm>
+            <a:off x="6446520" y="2907792"/>
+            <a:ext cx="1554480" cy="457200"/>
           </a:xfrm>
           <a:prstGeom prst="rect">
             <a:avLst/>
@@ -2128,7 +2137,7 @@
               <a:buNone/>
             </a:pPr>
             <a:r>
-              <a:rPr lang="en-US" sz="1450" b="1" dirty="0">
+              <a:rPr lang="en-US" sz="1250" b="1" dirty="0">
                 <a:solidFill>
                   <a:srgbClr val="1B1730"/>
                 </a:solidFill>
@@ -2138,36 +2147,36 @@
               </a:rPr>
               <a:t>AWS Lambda</a:t>
             </a:r>
-            <a:endParaRPr lang="en-US" sz="1450" dirty="0"/>
-          </a:p>
-        </p:txBody>
-      </p:sp>
-      <p:sp>
-        <p:nvSpPr>
-          <p:cNvPr id="21" name="Text 19"/>
-          <p:cNvSpPr/>
-          <p:nvPr/>
-        </p:nvSpPr>
-        <p:spPr>
-          <a:xfrm>
-            <a:off x="6243340" y="3200400"/>
-            <a:ext cx="1572768" cy="411480"/>
-          </a:xfrm>
-          <a:prstGeom prst="rect">
-            <a:avLst/>
-          </a:prstGeom>
-          <a:noFill/>
-          <a:ln/>
-        </p:spPr>
-        <p:txBody>
-          <a:bodyPr wrap="square" lIns="0" tIns="0" rIns="0" bIns="0" rtlCol="0" anchor="t"/>
+            <a:endParaRPr lang="en-US" sz="1250" dirty="0"/>
+          </a:p>
+        </p:txBody>
+      </p:sp>
+      <p:sp>
+        <p:nvSpPr>
+          <p:cNvPr id="20" name="Text 18"/>
+          <p:cNvSpPr/>
+          <p:nvPr/>
+        </p:nvSpPr>
+        <p:spPr>
+          <a:xfrm>
+            <a:off x="6473952" y="3401568"/>
+            <a:ext cx="1499616" cy="457200"/>
+          </a:xfrm>
+          <a:prstGeom prst="rect">
+            <a:avLst/>
+          </a:prstGeom>
+          <a:noFill/>
+          <a:ln/>
+        </p:spPr>
+        <p:txBody>
+          <a:bodyPr wrap="square" lIns="0" tIns="0" rIns="0" bIns="0" rtlCol="0" anchor="ctr"/>
           <a:lstStyle/>
           <a:p>
             <a:pPr algn="ctr" indent="0" marL="0">
               <a:buNone/>
             </a:pPr>
             <a:r>
-              <a:rPr lang="en-US" sz="1050" dirty="0">
+              <a:rPr lang="en-US" sz="900" dirty="0">
                 <a:solidFill>
                   <a:srgbClr val="665F78"/>
                 </a:solidFill>
@@ -2177,26 +2186,26 @@
               </a:rPr>
               <a:t>python3.12 ingest</a:t>
             </a:r>
-            <a:endParaRPr lang="en-US" sz="1050" dirty="0"/>
-          </a:p>
-        </p:txBody>
-      </p:sp>
-      <p:sp>
-        <p:nvSpPr>
-          <p:cNvPr id="22" name="Shape 20"/>
-          <p:cNvSpPr/>
-          <p:nvPr/>
-        </p:nvSpPr>
-        <p:spPr>
-          <a:xfrm>
-            <a:off x="7834396" y="3154680"/>
-            <a:ext cx="258409" cy="0"/>
+            <a:endParaRPr lang="en-US" sz="900" dirty="0"/>
+          </a:p>
+        </p:txBody>
+      </p:sp>
+      <p:sp>
+        <p:nvSpPr>
+          <p:cNvPr id="21" name="Shape 19"/>
+          <p:cNvSpPr/>
+          <p:nvPr/>
+        </p:nvSpPr>
+        <p:spPr>
+          <a:xfrm>
+            <a:off x="7964424" y="3337560"/>
+            <a:ext cx="164592" cy="0"/>
           </a:xfrm>
           <a:prstGeom prst="line">
             <a:avLst/>
           </a:prstGeom>
           <a:noFill/>
-          <a:ln w="25400">
+          <a:ln w="20320">
             <a:solidFill>
               <a:srgbClr val="8F79C0"/>
             </a:solidFill>
@@ -2207,24 +2216,24 @@
       </p:sp>
       <p:sp>
         <p:nvSpPr>
-          <p:cNvPr id="23" name="Shape 21"/>
-          <p:cNvSpPr/>
-          <p:nvPr/>
-        </p:nvSpPr>
-        <p:spPr>
-          <a:xfrm>
-            <a:off x="8111094" y="2468880"/>
-            <a:ext cx="1572768" cy="1371600"/>
+          <p:cNvPr id="22" name="Shape 20"/>
+          <p:cNvSpPr/>
+          <p:nvPr/>
+        </p:nvSpPr>
+        <p:spPr>
+          <a:xfrm>
+            <a:off x="8138160" y="2651760"/>
+            <a:ext cx="1463040" cy="1371600"/>
           </a:xfrm>
           <a:prstGeom prst="roundRect">
             <a:avLst>
-              <a:gd name="adj" fmla="val 6667"/>
+              <a:gd name="adj" fmla="val 5333"/>
             </a:avLst>
           </a:prstGeom>
           <a:solidFill>
-            <a:srgbClr val="F1EEF8"/>
+            <a:srgbClr val="FFFFFF"/>
           </a:solidFill>
-          <a:ln w="19050">
+          <a:ln w="15240">
             <a:solidFill>
               <a:srgbClr val="4B2F83"/>
             </a:solidFill>
@@ -2234,34 +2243,14 @@
       </p:sp>
       <p:sp>
         <p:nvSpPr>
-          <p:cNvPr id="24" name="Shape 22"/>
-          <p:cNvSpPr/>
-          <p:nvPr/>
-        </p:nvSpPr>
-        <p:spPr>
-          <a:xfrm>
-            <a:off x="8806038" y="2633472"/>
-            <a:ext cx="182880" cy="182880"/>
-          </a:xfrm>
-          <a:prstGeom prst="ellipse">
-            <a:avLst/>
-          </a:prstGeom>
-          <a:solidFill>
-            <a:srgbClr val="4B2F83"/>
-          </a:solidFill>
-          <a:ln/>
-        </p:spPr>
-      </p:sp>
-      <p:sp>
-        <p:nvSpPr>
-          <p:cNvPr id="25" name="Text 23"/>
-          <p:cNvSpPr/>
-          <p:nvPr/>
-        </p:nvSpPr>
-        <p:spPr>
-          <a:xfrm>
-            <a:off x="8083662" y="2852928"/>
-            <a:ext cx="1627632" cy="365760"/>
+          <p:cNvPr id="23" name="Text 21"/>
+          <p:cNvSpPr/>
+          <p:nvPr/>
+        </p:nvSpPr>
+        <p:spPr>
+          <a:xfrm>
+            <a:off x="8092440" y="2907792"/>
+            <a:ext cx="1554480" cy="457200"/>
           </a:xfrm>
           <a:prstGeom prst="rect">
             <a:avLst/>
@@ -2277,7 +2266,7 @@
               <a:buNone/>
             </a:pPr>
             <a:r>
-              <a:rPr lang="en-US" sz="1450" b="1" dirty="0">
+              <a:rPr lang="en-US" sz="1250" b="1" dirty="0">
                 <a:solidFill>
                   <a:srgbClr val="1B1730"/>
                 </a:solidFill>
@@ -2287,36 +2276,36 @@
               </a:rPr>
               <a:t>DynamoDB</a:t>
             </a:r>
-            <a:endParaRPr lang="en-US" sz="1450" dirty="0"/>
-          </a:p>
-        </p:txBody>
-      </p:sp>
-      <p:sp>
-        <p:nvSpPr>
-          <p:cNvPr id="26" name="Text 24"/>
-          <p:cNvSpPr/>
-          <p:nvPr/>
-        </p:nvSpPr>
-        <p:spPr>
-          <a:xfrm>
-            <a:off x="8111094" y="3200400"/>
-            <a:ext cx="1572768" cy="411480"/>
-          </a:xfrm>
-          <a:prstGeom prst="rect">
-            <a:avLst/>
-          </a:prstGeom>
-          <a:noFill/>
-          <a:ln/>
-        </p:spPr>
-        <p:txBody>
-          <a:bodyPr wrap="square" lIns="0" tIns="0" rIns="0" bIns="0" rtlCol="0" anchor="t"/>
+            <a:endParaRPr lang="en-US" sz="1250" dirty="0"/>
+          </a:p>
+        </p:txBody>
+      </p:sp>
+      <p:sp>
+        <p:nvSpPr>
+          <p:cNvPr id="24" name="Text 22"/>
+          <p:cNvSpPr/>
+          <p:nvPr/>
+        </p:nvSpPr>
+        <p:spPr>
+          <a:xfrm>
+            <a:off x="8119872" y="3401568"/>
+            <a:ext cx="1499616" cy="457200"/>
+          </a:xfrm>
+          <a:prstGeom prst="rect">
+            <a:avLst/>
+          </a:prstGeom>
+          <a:noFill/>
+          <a:ln/>
+        </p:spPr>
+        <p:txBody>
+          <a:bodyPr wrap="square" lIns="0" tIns="0" rIns="0" bIns="0" rtlCol="0" anchor="ctr"/>
           <a:lstStyle/>
           <a:p>
             <a:pPr algn="ctr" indent="0" marL="0">
               <a:buNone/>
             </a:pPr>
             <a:r>
-              <a:rPr lang="en-US" sz="1050" dirty="0">
+              <a:rPr lang="en-US" sz="900" dirty="0">
                 <a:solidFill>
                   <a:srgbClr val="665F78"/>
                 </a:solidFill>
@@ -2326,26 +2315,26 @@
               </a:rPr>
               <a:t>window store</a:t>
             </a:r>
-            <a:endParaRPr lang="en-US" sz="1050" dirty="0"/>
-          </a:p>
-        </p:txBody>
-      </p:sp>
-      <p:sp>
-        <p:nvSpPr>
-          <p:cNvPr id="27" name="Shape 25"/>
-          <p:cNvSpPr/>
-          <p:nvPr/>
-        </p:nvSpPr>
-        <p:spPr>
-          <a:xfrm>
-            <a:off x="9702150" y="3154680"/>
-            <a:ext cx="258409" cy="0"/>
+            <a:endParaRPr lang="en-US" sz="900" dirty="0"/>
+          </a:p>
+        </p:txBody>
+      </p:sp>
+      <p:sp>
+        <p:nvSpPr>
+          <p:cNvPr id="25" name="Shape 23"/>
+          <p:cNvSpPr/>
+          <p:nvPr/>
+        </p:nvSpPr>
+        <p:spPr>
+          <a:xfrm>
+            <a:off x="9610344" y="3337560"/>
+            <a:ext cx="164592" cy="0"/>
           </a:xfrm>
           <a:prstGeom prst="line">
             <a:avLst/>
           </a:prstGeom>
           <a:noFill/>
-          <a:ln w="25400">
+          <a:ln w="20320">
             <a:solidFill>
               <a:srgbClr val="8F79C0"/>
             </a:solidFill>
@@ -2356,24 +2345,24 @@
       </p:sp>
       <p:sp>
         <p:nvSpPr>
-          <p:cNvPr id="28" name="Shape 26"/>
-          <p:cNvSpPr/>
-          <p:nvPr/>
-        </p:nvSpPr>
-        <p:spPr>
-          <a:xfrm>
-            <a:off x="9978847" y="2468880"/>
-            <a:ext cx="1572768" cy="1371600"/>
+          <p:cNvPr id="26" name="Shape 24"/>
+          <p:cNvSpPr/>
+          <p:nvPr/>
+        </p:nvSpPr>
+        <p:spPr>
+          <a:xfrm>
+            <a:off x="9784080" y="2651760"/>
+            <a:ext cx="1463040" cy="1371600"/>
           </a:xfrm>
           <a:prstGeom prst="roundRect">
             <a:avLst>
-              <a:gd name="adj" fmla="val 6667"/>
+              <a:gd name="adj" fmla="val 5333"/>
             </a:avLst>
           </a:prstGeom>
           <a:solidFill>
-            <a:srgbClr val="F1EEF8"/>
+            <a:srgbClr val="FFFFFF"/>
           </a:solidFill>
-          <a:ln w="19050">
+          <a:ln w="15240">
             <a:solidFill>
               <a:srgbClr val="6A51AB"/>
             </a:solidFill>
@@ -2383,34 +2372,14 @@
       </p:sp>
       <p:sp>
         <p:nvSpPr>
-          <p:cNvPr id="29" name="Shape 27"/>
-          <p:cNvSpPr/>
-          <p:nvPr/>
-        </p:nvSpPr>
-        <p:spPr>
-          <a:xfrm>
-            <a:off x="10673791" y="2633472"/>
-            <a:ext cx="182880" cy="182880"/>
-          </a:xfrm>
-          <a:prstGeom prst="ellipse">
-            <a:avLst/>
-          </a:prstGeom>
-          <a:solidFill>
-            <a:srgbClr val="6A51AB"/>
-          </a:solidFill>
-          <a:ln/>
-        </p:spPr>
-      </p:sp>
-      <p:sp>
-        <p:nvSpPr>
-          <p:cNvPr id="30" name="Text 28"/>
-          <p:cNvSpPr/>
-          <p:nvPr/>
-        </p:nvSpPr>
-        <p:spPr>
-          <a:xfrm>
-            <a:off x="9951415" y="2852928"/>
-            <a:ext cx="1627632" cy="365760"/>
+          <p:cNvPr id="27" name="Text 25"/>
+          <p:cNvSpPr/>
+          <p:nvPr/>
+        </p:nvSpPr>
+        <p:spPr>
+          <a:xfrm>
+            <a:off x="9738360" y="2907792"/>
+            <a:ext cx="1554480" cy="457200"/>
           </a:xfrm>
           <a:prstGeom prst="rect">
             <a:avLst/>
@@ -2426,7 +2395,7 @@
               <a:buNone/>
             </a:pPr>
             <a:r>
-              <a:rPr lang="en-US" sz="1450" b="1" dirty="0">
+              <a:rPr lang="en-US" sz="1250" b="1" dirty="0">
                 <a:solidFill>
                   <a:srgbClr val="1B1730"/>
                 </a:solidFill>
@@ -2436,36 +2405,36 @@
               </a:rPr>
               <a:t>API GW + S3</a:t>
             </a:r>
-            <a:endParaRPr lang="en-US" sz="1450" dirty="0"/>
-          </a:p>
-        </p:txBody>
-      </p:sp>
-      <p:sp>
-        <p:nvSpPr>
-          <p:cNvPr id="31" name="Text 29"/>
-          <p:cNvSpPr/>
-          <p:nvPr/>
-        </p:nvSpPr>
-        <p:spPr>
-          <a:xfrm>
-            <a:off x="9978847" y="3200400"/>
-            <a:ext cx="1572768" cy="411480"/>
-          </a:xfrm>
-          <a:prstGeom prst="rect">
-            <a:avLst/>
-          </a:prstGeom>
-          <a:noFill/>
-          <a:ln/>
-        </p:spPr>
-        <p:txBody>
-          <a:bodyPr wrap="square" lIns="0" tIns="0" rIns="0" bIns="0" rtlCol="0" anchor="t"/>
+            <a:endParaRPr lang="en-US" sz="1250" dirty="0"/>
+          </a:p>
+        </p:txBody>
+      </p:sp>
+      <p:sp>
+        <p:nvSpPr>
+          <p:cNvPr id="28" name="Text 26"/>
+          <p:cNvSpPr/>
+          <p:nvPr/>
+        </p:nvSpPr>
+        <p:spPr>
+          <a:xfrm>
+            <a:off x="9765792" y="3401568"/>
+            <a:ext cx="1499616" cy="457200"/>
+          </a:xfrm>
+          <a:prstGeom prst="rect">
+            <a:avLst/>
+          </a:prstGeom>
+          <a:noFill/>
+          <a:ln/>
+        </p:spPr>
+        <p:txBody>
+          <a:bodyPr wrap="square" lIns="0" tIns="0" rIns="0" bIns="0" rtlCol="0" anchor="ctr"/>
           <a:lstStyle/>
           <a:p>
             <a:pPr algn="ctr" indent="0" marL="0">
               <a:buNone/>
             </a:pPr>
             <a:r>
-              <a:rPr lang="en-US" sz="1050" dirty="0">
+              <a:rPr lang="en-US" sz="900" dirty="0">
                 <a:solidFill>
                   <a:srgbClr val="665F78"/>
                 </a:solidFill>
@@ -2475,91 +2444,13 @@
               </a:rPr>
               <a:t>capacity console</a:t>
             </a:r>
-            <a:endParaRPr lang="en-US" sz="1050" dirty="0"/>
-          </a:p>
-        </p:txBody>
-      </p:sp>
-      <p:sp>
-        <p:nvSpPr>
-          <p:cNvPr id="32" name="Text 30"/>
-          <p:cNvSpPr/>
-          <p:nvPr/>
-        </p:nvSpPr>
-        <p:spPr>
-          <a:xfrm>
-            <a:off x="640080" y="3977640"/>
-            <a:ext cx="3440521" cy="274320"/>
-          </a:xfrm>
-          <a:prstGeom prst="rect">
-            <a:avLst/>
-          </a:prstGeom>
-          <a:noFill/>
-          <a:ln/>
-        </p:spPr>
-        <p:txBody>
-          <a:bodyPr wrap="square" rtlCol="0" anchor="ctr"/>
-          <a:lstStyle/>
-          <a:p>
-            <a:pPr algn="ctr" indent="0" marL="0">
-              <a:buNone/>
-            </a:pPr>
-            <a:r>
-              <a:rPr lang="en-US" sz="1100" b="1" spc="200" kern="0" dirty="0">
-                <a:solidFill>
-                  <a:srgbClr val="8F79C0"/>
-                </a:solidFill>
-                <a:latin typeface="Calibri" pitchFamily="34" charset="0"/>
-                <a:ea typeface="Calibri" pitchFamily="34" charset="-122"/>
-                <a:cs typeface="Calibri" pitchFamily="34" charset="-120"/>
-              </a:rPr>
-              <a:t>EDGE</a:t>
-            </a:r>
-            <a:endParaRPr lang="en-US" sz="1100" dirty="0"/>
-          </a:p>
-        </p:txBody>
-      </p:sp>
-      <p:sp>
-        <p:nvSpPr>
-          <p:cNvPr id="33" name="Text 31"/>
-          <p:cNvSpPr/>
-          <p:nvPr/>
-        </p:nvSpPr>
-        <p:spPr>
-          <a:xfrm>
-            <a:off x="4375587" y="3977640"/>
-            <a:ext cx="7176028" cy="274320"/>
-          </a:xfrm>
-          <a:prstGeom prst="rect">
-            <a:avLst/>
-          </a:prstGeom>
-          <a:noFill/>
-          <a:ln/>
-        </p:spPr>
-        <p:txBody>
-          <a:bodyPr wrap="square" rtlCol="0" anchor="ctr"/>
-          <a:lstStyle/>
-          <a:p>
-            <a:pPr algn="ctr" indent="0" marL="0">
-              <a:buNone/>
-            </a:pPr>
-            <a:r>
-              <a:rPr lang="en-US" sz="1100" b="1" spc="200" kern="0" dirty="0">
-                <a:solidFill>
-                  <a:srgbClr val="4B2F83"/>
-                </a:solidFill>
-                <a:latin typeface="Calibri" pitchFamily="34" charset="0"/>
-                <a:ea typeface="Calibri" pitchFamily="34" charset="-122"/>
-                <a:cs typeface="Calibri" pitchFamily="34" charset="-120"/>
-              </a:rPr>
-              <a:t>CLOUD</a:t>
-            </a:r>
-            <a:endParaRPr lang="en-US" sz="1100" dirty="0"/>
-          </a:p>
-        </p:txBody>
-      </p:sp>
-      <p:sp>
-        <p:nvSpPr>
-          <p:cNvPr id="34" name="Text 32"/>
+            <a:endParaRPr lang="en-US" sz="900" dirty="0"/>
+          </a:p>
+        </p:txBody>
+      </p:sp>
+      <p:sp>
+        <p:nvSpPr>
+          <p:cNvPr id="29" name="Text 27"/>
           <p:cNvSpPr/>
           <p:nvPr/>
         </p:nvSpPr>

--- a/ppt/Pooja_X25120921_smart-parking-management.pptx
+++ b/ppt/Pooja_X25120921_smart-parking-management.pptx
@@ -2605,8 +2605,35 @@
         </p:nvSpPr>
         <p:spPr>
           <a:xfrm>
-            <a:off x="731520" y="1965960"/>
-            <a:ext cx="685800" cy="685800"/>
+            <a:off x="640080" y="1874520"/>
+            <a:ext cx="3502152" cy="3977640"/>
+          </a:xfrm>
+          <a:prstGeom prst="roundRect">
+            <a:avLst>
+              <a:gd name="adj" fmla="val 2611"/>
+            </a:avLst>
+          </a:prstGeom>
+          <a:solidFill>
+            <a:srgbClr val="F1EEF8"/>
+          </a:solidFill>
+          <a:ln w="15240">
+            <a:solidFill>
+              <a:srgbClr val="6A51AB"/>
+            </a:solidFill>
+            <a:prstDash val="solid"/>
+          </a:ln>
+        </p:spPr>
+      </p:sp>
+      <p:sp>
+        <p:nvSpPr>
+          <p:cNvPr id="5" name="Shape 3"/>
+          <p:cNvSpPr/>
+          <p:nvPr/>
+        </p:nvSpPr>
+        <p:spPr>
+          <a:xfrm>
+            <a:off x="914400" y="2148840"/>
+            <a:ext cx="603504" cy="603504"/>
           </a:xfrm>
           <a:prstGeom prst="ellipse">
             <a:avLst/>
@@ -2619,14 +2646,14 @@
       </p:sp>
       <p:sp>
         <p:nvSpPr>
-          <p:cNvPr id="5" name="Text 3"/>
-          <p:cNvSpPr/>
-          <p:nvPr/>
-        </p:nvSpPr>
-        <p:spPr>
-          <a:xfrm>
-            <a:off x="731520" y="1965960"/>
-            <a:ext cx="685800" cy="685800"/>
+          <p:cNvPr id="6" name="Text 4"/>
+          <p:cNvSpPr/>
+          <p:nvPr/>
+        </p:nvSpPr>
+        <p:spPr>
+          <a:xfrm>
+            <a:off x="914400" y="2148840"/>
+            <a:ext cx="603504" cy="603504"/>
           </a:xfrm>
           <a:prstGeom prst="rect">
             <a:avLst/>
@@ -2642,7 +2669,7 @@
               <a:buNone/>
             </a:pPr>
             <a:r>
-              <a:rPr lang="en-US" sz="2600" b="1" dirty="0">
+              <a:rPr lang="en-US" sz="2200" b="1" dirty="0">
                 <a:solidFill>
                   <a:srgbClr val="FFFFFF"/>
                 </a:solidFill>
@@ -2652,20 +2679,20 @@
               </a:rPr>
               <a:t>1</a:t>
             </a:r>
-            <a:endParaRPr lang="en-US" sz="2600" dirty="0"/>
-          </a:p>
-        </p:txBody>
-      </p:sp>
-      <p:sp>
-        <p:nvSpPr>
-          <p:cNvPr id="6" name="Text 4"/>
-          <p:cNvSpPr/>
-          <p:nvPr/>
-        </p:nvSpPr>
-        <p:spPr>
-          <a:xfrm>
-            <a:off x="1691640" y="1920240"/>
-            <a:ext cx="9875520" cy="411480"/>
+            <a:endParaRPr lang="en-US" sz="2200" dirty="0"/>
+          </a:p>
+        </p:txBody>
+      </p:sp>
+      <p:sp>
+        <p:nvSpPr>
+          <p:cNvPr id="7" name="Text 5"/>
+          <p:cNvSpPr/>
+          <p:nvPr/>
+        </p:nvSpPr>
+        <p:spPr>
+          <a:xfrm>
+            <a:off x="914400" y="2898648"/>
+            <a:ext cx="2953512" cy="777240"/>
           </a:xfrm>
           <a:prstGeom prst="rect">
             <a:avLst/>
@@ -2681,7 +2708,7 @@
               <a:buNone/>
             </a:pPr>
             <a:r>
-              <a:rPr lang="en-US" sz="1800" b="1" dirty="0">
+              <a:rPr lang="en-US" sz="1600" b="1" dirty="0">
                 <a:solidFill>
                   <a:srgbClr val="1B1730"/>
                 </a:solidFill>
@@ -2691,20 +2718,20 @@
               </a:rPr>
               <a:t>A capacity gauge and tier per lot</a:t>
             </a:r>
-            <a:endParaRPr lang="en-US" sz="1800" dirty="0"/>
-          </a:p>
-        </p:txBody>
-      </p:sp>
-      <p:sp>
-        <p:nvSpPr>
-          <p:cNvPr id="7" name="Text 5"/>
-          <p:cNvSpPr/>
-          <p:nvPr/>
-        </p:nvSpPr>
-        <p:spPr>
-          <a:xfrm>
-            <a:off x="1691640" y="2340864"/>
-            <a:ext cx="9875520" cy="640080"/>
+            <a:endParaRPr lang="en-US" sz="1600" dirty="0"/>
+          </a:p>
+        </p:txBody>
+      </p:sp>
+      <p:sp>
+        <p:nvSpPr>
+          <p:cNvPr id="8" name="Text 6"/>
+          <p:cNvSpPr/>
+          <p:nvPr/>
+        </p:nvSpPr>
+        <p:spPr>
+          <a:xfrm>
+            <a:off x="914400" y="3657600"/>
+            <a:ext cx="2953512" cy="2011680"/>
           </a:xfrm>
           <a:prstGeom prst="rect">
             <a:avLst/>
@@ -2717,10 +2744,13 @@
           <a:lstStyle/>
           <a:p>
             <a:pPr indent="0" marL="0">
-              <a:buNone/>
-            </a:pPr>
-            <a:r>
-              <a:rPr lang="en-US" sz="1350" dirty="0">
+              <a:lnSpc>
+                <a:spcPct val="106000"/>
+              </a:lnSpc>
+              <a:buNone/>
+            </a:pPr>
+            <a:r>
+              <a:rPr lang="en-US" sz="1250" dirty="0">
                 <a:solidFill>
                   <a:srgbClr val="665F78"/>
                 </a:solidFill>
@@ -2730,20 +2760,47 @@
               </a:rPr>
               <a:t>Each lot shows a live occupancy gauge and a four-tier badge — Quiet, Busy or Near-full — derived on read from its capacity percentage.</a:t>
             </a:r>
-            <a:endParaRPr lang="en-US" sz="1350" dirty="0"/>
-          </a:p>
-        </p:txBody>
-      </p:sp>
-      <p:sp>
-        <p:nvSpPr>
-          <p:cNvPr id="8" name="Shape 6"/>
-          <p:cNvSpPr/>
-          <p:nvPr/>
-        </p:nvSpPr>
-        <p:spPr>
-          <a:xfrm>
-            <a:off x="731520" y="3383280"/>
-            <a:ext cx="685800" cy="685800"/>
+            <a:endParaRPr lang="en-US" sz="1250" dirty="0"/>
+          </a:p>
+        </p:txBody>
+      </p:sp>
+      <p:sp>
+        <p:nvSpPr>
+          <p:cNvPr id="9" name="Shape 7"/>
+          <p:cNvSpPr/>
+          <p:nvPr/>
+        </p:nvSpPr>
+        <p:spPr>
+          <a:xfrm>
+            <a:off x="4416552" y="1874520"/>
+            <a:ext cx="3502152" cy="3977640"/>
+          </a:xfrm>
+          <a:prstGeom prst="roundRect">
+            <a:avLst>
+              <a:gd name="adj" fmla="val 2611"/>
+            </a:avLst>
+          </a:prstGeom>
+          <a:solidFill>
+            <a:srgbClr val="F1EEF8"/>
+          </a:solidFill>
+          <a:ln w="15240">
+            <a:solidFill>
+              <a:srgbClr val="6A51AB"/>
+            </a:solidFill>
+            <a:prstDash val="solid"/>
+          </a:ln>
+        </p:spPr>
+      </p:sp>
+      <p:sp>
+        <p:nvSpPr>
+          <p:cNvPr id="10" name="Shape 8"/>
+          <p:cNvSpPr/>
+          <p:nvPr/>
+        </p:nvSpPr>
+        <p:spPr>
+          <a:xfrm>
+            <a:off x="4690872" y="2148840"/>
+            <a:ext cx="603504" cy="603504"/>
           </a:xfrm>
           <a:prstGeom prst="ellipse">
             <a:avLst/>
@@ -2756,14 +2813,14 @@
       </p:sp>
       <p:sp>
         <p:nvSpPr>
-          <p:cNvPr id="9" name="Text 7"/>
-          <p:cNvSpPr/>
-          <p:nvPr/>
-        </p:nvSpPr>
-        <p:spPr>
-          <a:xfrm>
-            <a:off x="731520" y="3383280"/>
-            <a:ext cx="685800" cy="685800"/>
+          <p:cNvPr id="11" name="Text 9"/>
+          <p:cNvSpPr/>
+          <p:nvPr/>
+        </p:nvSpPr>
+        <p:spPr>
+          <a:xfrm>
+            <a:off x="4690872" y="2148840"/>
+            <a:ext cx="603504" cy="603504"/>
           </a:xfrm>
           <a:prstGeom prst="rect">
             <a:avLst/>
@@ -2779,7 +2836,7 @@
               <a:buNone/>
             </a:pPr>
             <a:r>
-              <a:rPr lang="en-US" sz="2600" b="1" dirty="0">
+              <a:rPr lang="en-US" sz="2200" b="1" dirty="0">
                 <a:solidFill>
                   <a:srgbClr val="FFFFFF"/>
                 </a:solidFill>
@@ -2789,20 +2846,20 @@
               </a:rPr>
               <a:t>2</a:t>
             </a:r>
-            <a:endParaRPr lang="en-US" sz="2600" dirty="0"/>
-          </a:p>
-        </p:txBody>
-      </p:sp>
-      <p:sp>
-        <p:nvSpPr>
-          <p:cNvPr id="10" name="Text 8"/>
-          <p:cNvSpPr/>
-          <p:nvPr/>
-        </p:nvSpPr>
-        <p:spPr>
-          <a:xfrm>
-            <a:off x="1691640" y="3337560"/>
-            <a:ext cx="9875520" cy="411480"/>
+            <a:endParaRPr lang="en-US" sz="2200" dirty="0"/>
+          </a:p>
+        </p:txBody>
+      </p:sp>
+      <p:sp>
+        <p:nvSpPr>
+          <p:cNvPr id="12" name="Text 10"/>
+          <p:cNvSpPr/>
+          <p:nvPr/>
+        </p:nvSpPr>
+        <p:spPr>
+          <a:xfrm>
+            <a:off x="4690872" y="2898648"/>
+            <a:ext cx="2953512" cy="777240"/>
           </a:xfrm>
           <a:prstGeom prst="rect">
             <a:avLst/>
@@ -2818,7 +2875,7 @@
               <a:buNone/>
             </a:pPr>
             <a:r>
-              <a:rPr lang="en-US" sz="1800" b="1" dirty="0">
+              <a:rPr lang="en-US" sz="1600" b="1" dirty="0">
                 <a:solidFill>
                   <a:srgbClr val="1B1730"/>
                 </a:solidFill>
@@ -2828,20 +2885,20 @@
               </a:rPr>
               <a:t>A fault outranks fullness</a:t>
             </a:r>
-            <a:endParaRPr lang="en-US" sz="1800" dirty="0"/>
-          </a:p>
-        </p:txBody>
-      </p:sp>
-      <p:sp>
-        <p:nvSpPr>
-          <p:cNvPr id="11" name="Text 9"/>
-          <p:cNvSpPr/>
-          <p:nvPr/>
-        </p:nvSpPr>
-        <p:spPr>
-          <a:xfrm>
-            <a:off x="1691640" y="3758184"/>
-            <a:ext cx="9875520" cy="640080"/>
+            <a:endParaRPr lang="en-US" sz="1600" dirty="0"/>
+          </a:p>
+        </p:txBody>
+      </p:sp>
+      <p:sp>
+        <p:nvSpPr>
+          <p:cNvPr id="13" name="Text 11"/>
+          <p:cNvSpPr/>
+          <p:nvPr/>
+        </p:nvSpPr>
+        <p:spPr>
+          <a:xfrm>
+            <a:off x="4690872" y="3657600"/>
+            <a:ext cx="2953512" cy="2011680"/>
           </a:xfrm>
           <a:prstGeom prst="rect">
             <a:avLst/>
@@ -2854,10 +2911,13 @@
           <a:lstStyle/>
           <a:p>
             <a:pPr indent="0" marL="0">
-              <a:buNone/>
-            </a:pPr>
-            <a:r>
-              <a:rPr lang="en-US" sz="1350" dirty="0">
+              <a:lnSpc>
+                <a:spcPct val="106000"/>
+              </a:lnSpc>
+              <a:buNone/>
+            </a:pPr>
+            <a:r>
+              <a:rPr lang="en-US" sz="1250" dirty="0">
                 <a:solidFill>
                   <a:srgbClr val="665F78"/>
                 </a:solidFill>
@@ -2867,20 +2927,47 @@
               </a:rPr>
               <a:t>LOT-B reads Alert on a gate-fault alarm despite low occupancy, while LOT-A reads Normal — the fusion always shows the more urgent of the two.</a:t>
             </a:r>
-            <a:endParaRPr lang="en-US" sz="1350" dirty="0"/>
-          </a:p>
-        </p:txBody>
-      </p:sp>
-      <p:sp>
-        <p:nvSpPr>
-          <p:cNvPr id="12" name="Shape 10"/>
-          <p:cNvSpPr/>
-          <p:nvPr/>
-        </p:nvSpPr>
-        <p:spPr>
-          <a:xfrm>
-            <a:off x="731520" y="4800600"/>
-            <a:ext cx="685800" cy="685800"/>
+            <a:endParaRPr lang="en-US" sz="1250" dirty="0"/>
+          </a:p>
+        </p:txBody>
+      </p:sp>
+      <p:sp>
+        <p:nvSpPr>
+          <p:cNvPr id="14" name="Shape 12"/>
+          <p:cNvSpPr/>
+          <p:nvPr/>
+        </p:nvSpPr>
+        <p:spPr>
+          <a:xfrm>
+            <a:off x="8193024" y="1874520"/>
+            <a:ext cx="3502152" cy="3977640"/>
+          </a:xfrm>
+          <a:prstGeom prst="roundRect">
+            <a:avLst>
+              <a:gd name="adj" fmla="val 2611"/>
+            </a:avLst>
+          </a:prstGeom>
+          <a:solidFill>
+            <a:srgbClr val="F1EEF8"/>
+          </a:solidFill>
+          <a:ln w="15240">
+            <a:solidFill>
+              <a:srgbClr val="6A51AB"/>
+            </a:solidFill>
+            <a:prstDash val="solid"/>
+          </a:ln>
+        </p:spPr>
+      </p:sp>
+      <p:sp>
+        <p:nvSpPr>
+          <p:cNvPr id="15" name="Shape 13"/>
+          <p:cNvSpPr/>
+          <p:nvPr/>
+        </p:nvSpPr>
+        <p:spPr>
+          <a:xfrm>
+            <a:off x="8467344" y="2148840"/>
+            <a:ext cx="603504" cy="603504"/>
           </a:xfrm>
           <a:prstGeom prst="ellipse">
             <a:avLst/>
@@ -2893,14 +2980,14 @@
       </p:sp>
       <p:sp>
         <p:nvSpPr>
-          <p:cNvPr id="13" name="Text 11"/>
-          <p:cNvSpPr/>
-          <p:nvPr/>
-        </p:nvSpPr>
-        <p:spPr>
-          <a:xfrm>
-            <a:off x="731520" y="4800600"/>
-            <a:ext cx="685800" cy="685800"/>
+          <p:cNvPr id="16" name="Text 14"/>
+          <p:cNvSpPr/>
+          <p:nvPr/>
+        </p:nvSpPr>
+        <p:spPr>
+          <a:xfrm>
+            <a:off x="8467344" y="2148840"/>
+            <a:ext cx="603504" cy="603504"/>
           </a:xfrm>
           <a:prstGeom prst="rect">
             <a:avLst/>
@@ -2916,7 +3003,7 @@
               <a:buNone/>
             </a:pPr>
             <a:r>
-              <a:rPr lang="en-US" sz="2600" b="1" dirty="0">
+              <a:rPr lang="en-US" sz="2200" b="1" dirty="0">
                 <a:solidFill>
                   <a:srgbClr val="FFFFFF"/>
                 </a:solidFill>
@@ -2926,20 +3013,20 @@
               </a:rPr>
               <a:t>3</a:t>
             </a:r>
-            <a:endParaRPr lang="en-US" sz="2600" dirty="0"/>
-          </a:p>
-        </p:txBody>
-      </p:sp>
-      <p:sp>
-        <p:nvSpPr>
-          <p:cNvPr id="14" name="Text 12"/>
-          <p:cNvSpPr/>
-          <p:nvPr/>
-        </p:nvSpPr>
-        <p:spPr>
-          <a:xfrm>
-            <a:off x="1691640" y="4754880"/>
-            <a:ext cx="9875520" cy="411480"/>
+            <a:endParaRPr lang="en-US" sz="2200" dirty="0"/>
+          </a:p>
+        </p:txBody>
+      </p:sp>
+      <p:sp>
+        <p:nvSpPr>
+          <p:cNvPr id="17" name="Text 15"/>
+          <p:cNvSpPr/>
+          <p:nvPr/>
+        </p:nvSpPr>
+        <p:spPr>
+          <a:xfrm>
+            <a:off x="8467344" y="2898648"/>
+            <a:ext cx="2953512" cy="777240"/>
           </a:xfrm>
           <a:prstGeom prst="rect">
             <a:avLst/>
@@ -2955,7 +3042,7 @@
               <a:buNone/>
             </a:pPr>
             <a:r>
-              <a:rPr lang="en-US" sz="1800" b="1" dirty="0">
+              <a:rPr lang="en-US" sz="1600" b="1" dirty="0">
                 <a:solidFill>
                   <a:srgbClr val="1B1730"/>
                 </a:solidFill>
@@ -2965,20 +3052,20 @@
               </a:rPr>
               <a:t>An occupied-spaces trend per lot</a:t>
             </a:r>
-            <a:endParaRPr lang="en-US" sz="1800" dirty="0"/>
-          </a:p>
-        </p:txBody>
-      </p:sp>
-      <p:sp>
-        <p:nvSpPr>
-          <p:cNvPr id="15" name="Text 13"/>
-          <p:cNvSpPr/>
-          <p:nvPr/>
-        </p:nvSpPr>
-        <p:spPr>
-          <a:xfrm>
-            <a:off x="1691640" y="5175504"/>
-            <a:ext cx="9875520" cy="640080"/>
+            <a:endParaRPr lang="en-US" sz="1600" dirty="0"/>
+          </a:p>
+        </p:txBody>
+      </p:sp>
+      <p:sp>
+        <p:nvSpPr>
+          <p:cNvPr id="18" name="Text 16"/>
+          <p:cNvSpPr/>
+          <p:nvPr/>
+        </p:nvSpPr>
+        <p:spPr>
+          <a:xfrm>
+            <a:off x="8467344" y="3657600"/>
+            <a:ext cx="2953512" cy="2011680"/>
           </a:xfrm>
           <a:prstGeom prst="rect">
             <a:avLst/>
@@ -2991,10 +3078,13 @@
           <a:lstStyle/>
           <a:p>
             <a:pPr indent="0" marL="0">
-              <a:buNone/>
-            </a:pPr>
-            <a:r>
-              <a:rPr lang="en-US" sz="1350" dirty="0">
+              <a:lnSpc>
+                <a:spcPct val="106000"/>
+              </a:lnSpc>
+              <a:buNone/>
+            </a:pPr>
+            <a:r>
+              <a:rPr lang="en-US" sz="1250" dirty="0">
                 <a:solidFill>
                   <a:srgbClr val="665F78"/>
                 </a:solidFill>
@@ -3004,46 +3094,7 @@
               </a:rPr>
               <a:t>The chart tracks both lots live, so a filling lot is visible before it reaches the near-full tier.</a:t>
             </a:r>
-            <a:endParaRPr lang="en-US" sz="1350" dirty="0"/>
-          </a:p>
-        </p:txBody>
-      </p:sp>
-      <p:sp>
-        <p:nvSpPr>
-          <p:cNvPr id="16" name="Text 14"/>
-          <p:cNvSpPr/>
-          <p:nvPr/>
-        </p:nvSpPr>
-        <p:spPr>
-          <a:xfrm>
-            <a:off x="640080" y="6263640"/>
-            <a:ext cx="10972800" cy="365760"/>
-          </a:xfrm>
-          <a:prstGeom prst="rect">
-            <a:avLst/>
-          </a:prstGeom>
-          <a:noFill/>
-          <a:ln/>
-        </p:spPr>
-        <p:txBody>
-          <a:bodyPr wrap="square" rtlCol="0" anchor="ctr"/>
-          <a:lstStyle/>
-          <a:p>
-            <a:pPr indent="0" marL="0">
-              <a:buNone/>
-            </a:pPr>
-            <a:r>
-              <a:rPr lang="en-US" sz="1300" i="1" dirty="0">
-                <a:solidFill>
-                  <a:srgbClr val="8F79C0"/>
-                </a:solidFill>
-                <a:latin typeface="Calibri" pitchFamily="34" charset="0"/>
-                <a:ea typeface="Calibri" pitchFamily="34" charset="-122"/>
-                <a:cs typeface="Calibri" pitchFamily="34" charset="-120"/>
-              </a:rPr>
-              <a:t>Switch to the live dashboard here — backup video ready.</a:t>
-            </a:r>
-            <a:endParaRPr lang="en-US" sz="1300" dirty="0"/>
+            <a:endParaRPr lang="en-US" sz="1250" dirty="0"/>
           </a:p>
         </p:txBody>
       </p:sp>
@@ -3120,59 +3171,24 @@
       </p:sp>
       <p:sp>
         <p:nvSpPr>
-          <p:cNvPr id="3" name="Text 1"/>
-          <p:cNvSpPr/>
-          <p:nvPr/>
-        </p:nvSpPr>
-        <p:spPr>
-          <a:xfrm>
-            <a:off x="731520" y="1965960"/>
-            <a:ext cx="2377440" cy="548640"/>
-          </a:xfrm>
-          <a:prstGeom prst="rect">
-            <a:avLst/>
-          </a:prstGeom>
-          <a:noFill/>
-          <a:ln/>
-        </p:spPr>
-        <p:txBody>
-          <a:bodyPr wrap="square" lIns="0" tIns="0" rIns="0" bIns="0" rtlCol="0" anchor="ctr"/>
-          <a:lstStyle/>
-          <a:p>
-            <a:pPr indent="0" marL="0">
-              <a:buNone/>
-            </a:pPr>
-            <a:r>
-              <a:rPr lang="en-US" sz="2300" b="1" dirty="0">
-                <a:solidFill>
-                  <a:srgbClr val="E3A93C"/>
-                </a:solidFill>
-                <a:latin typeface="Century Schoolbook" pitchFamily="34" charset="0"/>
-                <a:ea typeface="Century Schoolbook" pitchFamily="34" charset="-122"/>
-                <a:cs typeface="Century Schoolbook" pitchFamily="34" charset="-120"/>
-              </a:rPr>
-              <a:t>Problem</a:t>
-            </a:r>
-            <a:endParaRPr lang="en-US" sz="2300" dirty="0"/>
-          </a:p>
-        </p:txBody>
-      </p:sp>
-      <p:sp>
-        <p:nvSpPr>
-          <p:cNvPr id="4" name="Shape 2"/>
-          <p:cNvSpPr/>
-          <p:nvPr/>
-        </p:nvSpPr>
-        <p:spPr>
-          <a:xfrm>
-            <a:off x="3200400" y="1920240"/>
-            <a:ext cx="0" cy="1783080"/>
-          </a:xfrm>
-          <a:prstGeom prst="line">
-            <a:avLst/>
-          </a:prstGeom>
-          <a:noFill/>
-          <a:ln w="31750">
+          <p:cNvPr id="3" name="Shape 1"/>
+          <p:cNvSpPr/>
+          <p:nvPr/>
+        </p:nvSpPr>
+        <p:spPr>
+          <a:xfrm>
+            <a:off x="640080" y="1874520"/>
+            <a:ext cx="4937760" cy="4160520"/>
+          </a:xfrm>
+          <a:prstGeom prst="roundRect">
+            <a:avLst>
+              <a:gd name="adj" fmla="val 2198"/>
+            </a:avLst>
+          </a:prstGeom>
+          <a:solidFill>
+            <a:srgbClr val="F1EEF8"/>
+          </a:solidFill>
+          <a:ln w="19050">
             <a:solidFill>
               <a:srgbClr val="E3A93C"/>
             </a:solidFill>
@@ -3182,14 +3198,53 @@
       </p:sp>
       <p:sp>
         <p:nvSpPr>
+          <p:cNvPr id="4" name="Text 2"/>
+          <p:cNvSpPr/>
+          <p:nvPr/>
+        </p:nvSpPr>
+        <p:spPr>
+          <a:xfrm>
+            <a:off x="960120" y="2103120"/>
+            <a:ext cx="3657600" cy="457200"/>
+          </a:xfrm>
+          <a:prstGeom prst="rect">
+            <a:avLst/>
+          </a:prstGeom>
+          <a:noFill/>
+          <a:ln/>
+        </p:spPr>
+        <p:txBody>
+          <a:bodyPr wrap="square" lIns="0" tIns="0" rIns="0" bIns="0" rtlCol="0" anchor="ctr"/>
+          <a:lstStyle/>
+          <a:p>
+            <a:pPr indent="0" marL="0">
+              <a:buNone/>
+            </a:pPr>
+            <a:r>
+              <a:rPr lang="en-US" sz="1900" b="1" dirty="0">
+                <a:solidFill>
+                  <a:srgbClr val="E3A93C"/>
+                </a:solidFill>
+                <a:latin typeface="Century Schoolbook" pitchFamily="34" charset="0"/>
+                <a:ea typeface="Century Schoolbook" pitchFamily="34" charset="-122"/>
+                <a:cs typeface="Century Schoolbook" pitchFamily="34" charset="-120"/>
+              </a:rPr>
+              <a:t>Problem</a:t>
+            </a:r>
+            <a:endParaRPr lang="en-US" sz="1900" dirty="0"/>
+          </a:p>
+        </p:txBody>
+      </p:sp>
+      <p:sp>
+        <p:nvSpPr>
           <p:cNvPr id="5" name="Text 3"/>
           <p:cNvSpPr/>
           <p:nvPr/>
         </p:nvSpPr>
         <p:spPr>
           <a:xfrm>
-            <a:off x="3474720" y="1920240"/>
-            <a:ext cx="7955280" cy="1920240"/>
+            <a:off x="960120" y="2651760"/>
+            <a:ext cx="4343400" cy="3200400"/>
           </a:xfrm>
           <a:prstGeom prst="rect">
             <a:avLst/>
@@ -3208,7 +3263,7 @@
               <a:buNone/>
             </a:pPr>
             <a:r>
-              <a:rPr lang="en-US" sz="1450" dirty="0">
+              <a:rPr lang="en-US" sz="1350" dirty="0">
                 <a:solidFill>
                   <a:srgbClr val="1B1730"/>
                 </a:solidFill>
@@ -3218,65 +3273,30 @@
               </a:rPr>
               <a:t>Fullness is a smooth quantity that climbs and falls with the day; a fault is a discrete event — a gate stuck faulting, an inflow surge, a car dwelling far too long. A lot can be busy but perfectly healthy, or nearly empty yet faulted, so collapsing both into one number would hide whichever matters.</a:t>
             </a:r>
-            <a:endParaRPr lang="en-US" sz="1450" dirty="0"/>
-          </a:p>
-        </p:txBody>
-      </p:sp>
-      <p:sp>
-        <p:nvSpPr>
-          <p:cNvPr id="6" name="Text 4"/>
-          <p:cNvSpPr/>
-          <p:nvPr/>
-        </p:nvSpPr>
-        <p:spPr>
-          <a:xfrm>
-            <a:off x="731520" y="4114800"/>
-            <a:ext cx="2377440" cy="548640"/>
-          </a:xfrm>
-          <a:prstGeom prst="rect">
-            <a:avLst/>
-          </a:prstGeom>
-          <a:noFill/>
-          <a:ln/>
-        </p:spPr>
-        <p:txBody>
-          <a:bodyPr wrap="square" lIns="0" tIns="0" rIns="0" bIns="0" rtlCol="0" anchor="ctr"/>
-          <a:lstStyle/>
-          <a:p>
-            <a:pPr indent="0" marL="0">
-              <a:buNone/>
-            </a:pPr>
-            <a:r>
-              <a:rPr lang="en-US" sz="2300" b="1" dirty="0">
-                <a:solidFill>
-                  <a:srgbClr val="6A51AB"/>
-                </a:solidFill>
-                <a:latin typeface="Century Schoolbook" pitchFamily="34" charset="0"/>
-                <a:ea typeface="Century Schoolbook" pitchFamily="34" charset="-122"/>
-                <a:cs typeface="Century Schoolbook" pitchFamily="34" charset="-120"/>
-              </a:rPr>
-              <a:t>Solution</a:t>
-            </a:r>
-            <a:endParaRPr lang="en-US" sz="2300" dirty="0"/>
-          </a:p>
-        </p:txBody>
-      </p:sp>
-      <p:sp>
-        <p:nvSpPr>
-          <p:cNvPr id="7" name="Shape 5"/>
-          <p:cNvSpPr/>
-          <p:nvPr/>
-        </p:nvSpPr>
-        <p:spPr>
-          <a:xfrm>
-            <a:off x="3200400" y="4069080"/>
-            <a:ext cx="0" cy="1783080"/>
-          </a:xfrm>
-          <a:prstGeom prst="line">
-            <a:avLst/>
-          </a:prstGeom>
-          <a:noFill/>
-          <a:ln w="31750">
+            <a:endParaRPr lang="en-US" sz="1350" dirty="0"/>
+          </a:p>
+        </p:txBody>
+      </p:sp>
+      <p:sp>
+        <p:nvSpPr>
+          <p:cNvPr id="6" name="Shape 4"/>
+          <p:cNvSpPr/>
+          <p:nvPr/>
+        </p:nvSpPr>
+        <p:spPr>
+          <a:xfrm>
+            <a:off x="6611112" y="1874520"/>
+            <a:ext cx="4937760" cy="4160520"/>
+          </a:xfrm>
+          <a:prstGeom prst="roundRect">
+            <a:avLst>
+              <a:gd name="adj" fmla="val 2198"/>
+            </a:avLst>
+          </a:prstGeom>
+          <a:solidFill>
+            <a:srgbClr val="F1EEF8"/>
+          </a:solidFill>
+          <a:ln w="19050">
             <a:solidFill>
               <a:srgbClr val="6A51AB"/>
             </a:solidFill>
@@ -3286,14 +3306,53 @@
       </p:sp>
       <p:sp>
         <p:nvSpPr>
+          <p:cNvPr id="7" name="Text 5"/>
+          <p:cNvSpPr/>
+          <p:nvPr/>
+        </p:nvSpPr>
+        <p:spPr>
+          <a:xfrm>
+            <a:off x="6931152" y="2103120"/>
+            <a:ext cx="3657600" cy="457200"/>
+          </a:xfrm>
+          <a:prstGeom prst="rect">
+            <a:avLst/>
+          </a:prstGeom>
+          <a:noFill/>
+          <a:ln/>
+        </p:spPr>
+        <p:txBody>
+          <a:bodyPr wrap="square" lIns="0" tIns="0" rIns="0" bIns="0" rtlCol="0" anchor="ctr"/>
+          <a:lstStyle/>
+          <a:p>
+            <a:pPr indent="0" marL="0">
+              <a:buNone/>
+            </a:pPr>
+            <a:r>
+              <a:rPr lang="en-US" sz="1900" b="1" dirty="0">
+                <a:solidFill>
+                  <a:srgbClr val="6A51AB"/>
+                </a:solidFill>
+                <a:latin typeface="Century Schoolbook" pitchFamily="34" charset="0"/>
+                <a:ea typeface="Century Schoolbook" pitchFamily="34" charset="-122"/>
+                <a:cs typeface="Century Schoolbook" pitchFamily="34" charset="-120"/>
+              </a:rPr>
+              <a:t>Solution</a:t>
+            </a:r>
+            <a:endParaRPr lang="en-US" sz="1900" dirty="0"/>
+          </a:p>
+        </p:txBody>
+      </p:sp>
+      <p:sp>
+        <p:nvSpPr>
           <p:cNvPr id="8" name="Text 6"/>
           <p:cNvSpPr/>
           <p:nvPr/>
         </p:nvSpPr>
         <p:spPr>
           <a:xfrm>
-            <a:off x="3474720" y="4069080"/>
-            <a:ext cx="7955280" cy="1920240"/>
+            <a:off x="6931152" y="2651760"/>
+            <a:ext cx="4343400" cy="3200400"/>
           </a:xfrm>
           <a:prstGeom prst="rect">
             <a:avLst/>
@@ -3312,7 +3371,7 @@
               <a:buNone/>
             </a:pPr>
             <a:r>
-              <a:rPr lang="en-US" sz="1450" dirty="0">
+              <a:rPr lang="en-US" sz="1350" dirty="0">
                 <a:solidFill>
                   <a:srgbClr val="1B1730"/>
                 </a:solidFill>
@@ -3322,9 +3381,29 @@
               </a:rPr>
               <a:t>Keep them on separate axes: the fog raises the four hard fault alarms at the edge, and the dashboard buckets each lot's latest occupancy into Quiet / Busy / Near-full on read. The two fuse into one badge where any active fault outranks the fullness tier, so an operator always sees the more urgent of the two at a glance. The tier is derived fresh on every read, never stored.</a:t>
             </a:r>
-            <a:endParaRPr lang="en-US" sz="1450" dirty="0"/>
-          </a:p>
-        </p:txBody>
+            <a:endParaRPr lang="en-US" sz="1350" dirty="0"/>
+          </a:p>
+        </p:txBody>
+      </p:sp>
+      <p:sp>
+        <p:nvSpPr>
+          <p:cNvPr id="9" name="Shape 7"/>
+          <p:cNvSpPr/>
+          <p:nvPr/>
+        </p:nvSpPr>
+        <p:spPr>
+          <a:xfrm>
+            <a:off x="5669280" y="3703320"/>
+            <a:ext cx="841248" cy="512064"/>
+          </a:xfrm>
+          <a:prstGeom prst="rightArrow">
+            <a:avLst/>
+          </a:prstGeom>
+          <a:solidFill>
+            <a:srgbClr val="4B2F83"/>
+          </a:solidFill>
+          <a:ln/>
+        </p:spPr>
       </p:sp>
     </p:spTree>
   </p:cSld>

--- a/ppt/Pooja_X25120921_smart-parking-management.pptx
+++ b/ppt/Pooja_X25120921_smart-parking-management.pptx
@@ -1290,23 +1290,16 @@
         </p:nvSpPr>
         <p:spPr>
           <a:xfrm>
-            <a:off x="658368" y="5577840"/>
-            <a:ext cx="2651760" cy="566928"/>
-          </a:xfrm>
-          <a:prstGeom prst="roundRect">
-            <a:avLst>
-              <a:gd name="adj" fmla="val 50000"/>
-            </a:avLst>
-          </a:prstGeom>
-          <a:solidFill>
-            <a:srgbClr val="251F3D"/>
-          </a:solidFill>
-          <a:ln w="12700">
-            <a:solidFill>
-              <a:srgbClr val="E3A93C"/>
-            </a:solidFill>
-            <a:prstDash val="solid"/>
-          </a:ln>
+            <a:off x="658368" y="5724144"/>
+            <a:ext cx="146304" cy="146304"/>
+          </a:xfrm>
+          <a:prstGeom prst="rect">
+            <a:avLst/>
+          </a:prstGeom>
+          <a:solidFill>
+            <a:srgbClr val="E3A93C"/>
+          </a:solidFill>
+          <a:ln/>
         </p:spPr>
       </p:sp>
       <p:sp>
@@ -1317,8 +1310,8 @@
         </p:nvSpPr>
         <p:spPr>
           <a:xfrm>
-            <a:off x="658368" y="5577840"/>
-            <a:ext cx="2651760" cy="566928"/>
+            <a:off x="932688" y="5577840"/>
+            <a:ext cx="2560320" cy="457200"/>
           </a:xfrm>
           <a:prstGeom prst="rect">
             <a:avLst/>
@@ -1330,13 +1323,13 @@
           <a:bodyPr wrap="square" lIns="0" tIns="0" rIns="0" bIns="0" rtlCol="0" anchor="ctr"/>
           <a:lstStyle/>
           <a:p>
-            <a:pPr algn="ctr" indent="0" marL="0">
-              <a:buNone/>
-            </a:pPr>
-            <a:r>
-              <a:rPr lang="en-US" sz="1350" b="1" dirty="0">
-                <a:solidFill>
-                  <a:srgbClr val="E3A93C"/>
+            <a:pPr indent="0" marL="0">
+              <a:buNone/>
+            </a:pPr>
+            <a:r>
+              <a:rPr lang="en-US" sz="1400" b="1" dirty="0">
+                <a:solidFill>
+                  <a:srgbClr val="DBD0EC"/>
                 </a:solidFill>
                 <a:latin typeface="Calibri" pitchFamily="34" charset="0"/>
                 <a:ea typeface="Calibri" pitchFamily="34" charset="-122"/>
@@ -1344,7 +1337,7 @@
               </a:rPr>
               <a:t>Near full &gt; 270/300</a:t>
             </a:r>
-            <a:endParaRPr lang="en-US" sz="1350" dirty="0"/>
+            <a:endParaRPr lang="en-US" sz="1400" dirty="0"/>
           </a:p>
         </p:txBody>
       </p:sp>
@@ -1356,23 +1349,16 @@
         </p:nvSpPr>
         <p:spPr>
           <a:xfrm>
-            <a:off x="3538728" y="5577840"/>
-            <a:ext cx="2651760" cy="566928"/>
-          </a:xfrm>
-          <a:prstGeom prst="roundRect">
-            <a:avLst>
-              <a:gd name="adj" fmla="val 50000"/>
-            </a:avLst>
-          </a:prstGeom>
-          <a:solidFill>
-            <a:srgbClr val="251F3D"/>
-          </a:solidFill>
-          <a:ln w="12700">
-            <a:solidFill>
-              <a:srgbClr val="E3A93C"/>
-            </a:solidFill>
-            <a:prstDash val="solid"/>
-          </a:ln>
+            <a:off x="3538728" y="5724144"/>
+            <a:ext cx="146304" cy="146304"/>
+          </a:xfrm>
+          <a:prstGeom prst="rect">
+            <a:avLst/>
+          </a:prstGeom>
+          <a:solidFill>
+            <a:srgbClr val="E3A93C"/>
+          </a:solidFill>
+          <a:ln/>
         </p:spPr>
       </p:sp>
       <p:sp>
@@ -1383,8 +1369,8 @@
         </p:nvSpPr>
         <p:spPr>
           <a:xfrm>
-            <a:off x="3538728" y="5577840"/>
-            <a:ext cx="2651760" cy="566928"/>
+            <a:off x="3813048" y="5577840"/>
+            <a:ext cx="2560320" cy="457200"/>
           </a:xfrm>
           <a:prstGeom prst="rect">
             <a:avLst/>
@@ -1396,13 +1382,13 @@
           <a:bodyPr wrap="square" lIns="0" tIns="0" rIns="0" bIns="0" rtlCol="0" anchor="ctr"/>
           <a:lstStyle/>
           <a:p>
-            <a:pPr algn="ctr" indent="0" marL="0">
-              <a:buNone/>
-            </a:pPr>
-            <a:r>
-              <a:rPr lang="en-US" sz="1350" b="1" dirty="0">
-                <a:solidFill>
-                  <a:srgbClr val="E3A93C"/>
+            <a:pPr indent="0" marL="0">
+              <a:buNone/>
+            </a:pPr>
+            <a:r>
+              <a:rPr lang="en-US" sz="1400" b="1" dirty="0">
+                <a:solidFill>
+                  <a:srgbClr val="DBD0EC"/>
                 </a:solidFill>
                 <a:latin typeface="Calibri" pitchFamily="34" charset="0"/>
                 <a:ea typeface="Calibri" pitchFamily="34" charset="-122"/>
@@ -1410,7 +1396,7 @@
               </a:rPr>
               <a:t>Inflow &gt; 20 veh/min</a:t>
             </a:r>
-            <a:endParaRPr lang="en-US" sz="1350" dirty="0"/>
+            <a:endParaRPr lang="en-US" sz="1400" dirty="0"/>
           </a:p>
         </p:txBody>
       </p:sp>
@@ -1422,23 +1408,16 @@
         </p:nvSpPr>
         <p:spPr>
           <a:xfrm>
-            <a:off x="6419088" y="5577840"/>
-            <a:ext cx="2651760" cy="566928"/>
-          </a:xfrm>
-          <a:prstGeom prst="roundRect">
-            <a:avLst>
-              <a:gd name="adj" fmla="val 50000"/>
-            </a:avLst>
-          </a:prstGeom>
-          <a:solidFill>
-            <a:srgbClr val="251F3D"/>
-          </a:solidFill>
-          <a:ln w="12700">
-            <a:solidFill>
-              <a:srgbClr val="E3A93C"/>
-            </a:solidFill>
-            <a:prstDash val="solid"/>
-          </a:ln>
+            <a:off x="6419088" y="5724144"/>
+            <a:ext cx="146304" cy="146304"/>
+          </a:xfrm>
+          <a:prstGeom prst="rect">
+            <a:avLst/>
+          </a:prstGeom>
+          <a:solidFill>
+            <a:srgbClr val="E3A93C"/>
+          </a:solidFill>
+          <a:ln/>
         </p:spPr>
       </p:sp>
       <p:sp>
@@ -1449,8 +1428,8 @@
         </p:nvSpPr>
         <p:spPr>
           <a:xfrm>
-            <a:off x="6419088" y="5577840"/>
-            <a:ext cx="2651760" cy="566928"/>
+            <a:off x="6693408" y="5577840"/>
+            <a:ext cx="2560320" cy="457200"/>
           </a:xfrm>
           <a:prstGeom prst="rect">
             <a:avLst/>
@@ -1462,13 +1441,13 @@
           <a:bodyPr wrap="square" lIns="0" tIns="0" rIns="0" bIns="0" rtlCol="0" anchor="ctr"/>
           <a:lstStyle/>
           <a:p>
-            <a:pPr algn="ctr" indent="0" marL="0">
-              <a:buNone/>
-            </a:pPr>
-            <a:r>
-              <a:rPr lang="en-US" sz="1350" b="1" dirty="0">
-                <a:solidFill>
-                  <a:srgbClr val="E3A93C"/>
+            <a:pPr indent="0" marL="0">
+              <a:buNone/>
+            </a:pPr>
+            <a:r>
+              <a:rPr lang="en-US" sz="1400" b="1" dirty="0">
+                <a:solidFill>
+                  <a:srgbClr val="DBD0EC"/>
                 </a:solidFill>
                 <a:latin typeface="Calibri" pitchFamily="34" charset="0"/>
                 <a:ea typeface="Calibri" pitchFamily="34" charset="-122"/>
@@ -1476,7 +1455,7 @@
               </a:rPr>
               <a:t>Gate fault &gt; 3</a:t>
             </a:r>
-            <a:endParaRPr lang="en-US" sz="1350" dirty="0"/>
+            <a:endParaRPr lang="en-US" sz="1400" dirty="0"/>
           </a:p>
         </p:txBody>
       </p:sp>
@@ -1504,17 +1483,6 @@
             <a:pPr indent="0" marL="0">
               <a:buNone/>
             </a:pPr>
-            <a:r>
-              <a:rPr lang="en-US" sz="1250" dirty="0">
-                <a:solidFill>
-                  <a:srgbClr val="665F78"/>
-                </a:solidFill>
-                <a:latin typeface="Calibri" pitchFamily="34" charset="0"/>
-                <a:ea typeface="Calibri" pitchFamily="34" charset="-122"/>
-                <a:cs typeface="Calibri" pitchFamily="34" charset="-120"/>
-              </a:rPr>
-              <a:t>Fog &amp; Edge Computing (H9FECC)   ·   deployed live on AWS</a:t>
-            </a:r>
             <a:endParaRPr lang="en-US" sz="1250" dirty="0"/>
           </a:p>
         </p:txBody>
